--- a/Module 5/class_5.6/deep_learning_course_class_5.6.pptx
+++ b/Module 5/class_5.6/deep_learning_course_class_5.6.pptx
@@ -19,6 +19,11 @@
     <p:sldId id="264" r:id="rId15"/>
     <p:sldId id="265" r:id="rId16"/>
     <p:sldId id="266" r:id="rId17"/>
+    <p:sldId id="267" r:id="rId18"/>
+    <p:sldId id="268" r:id="rId19"/>
+    <p:sldId id="269" r:id="rId20"/>
+    <p:sldId id="270" r:id="rId21"/>
+    <p:sldId id="271" r:id="rId22"/>
   </p:sldIdLst>
   <p:sldSz cy="5143500" cx="9144000"/>
   <p:notesSz cx="6858000" cy="9144000"/>
@@ -800,7 +805,7 @@
   <p:cSld>
     <p:spTree>
       <p:nvGrpSpPr>
-        <p:cNvPr id="109" name="Shape 109"/>
+        <p:cNvPr id="112" name="Shape 112"/>
         <p:cNvGrpSpPr/>
         <p:nvPr/>
       </p:nvGrpSpPr>
@@ -814,7 +819,7 @@
       </p:grpSpPr>
       <p:sp>
         <p:nvSpPr>
-          <p:cNvPr id="110" name="Google Shape;110;g3d40fca4b17_0_49:notes"/>
+          <p:cNvPr id="113" name="Google Shape;113;g3d40fca4b17_0_49:notes"/>
           <p:cNvSpPr/>
           <p:nvPr>
             <p:ph idx="2" type="sldImg"/>
@@ -849,7 +854,7 @@
       </p:sp>
       <p:sp>
         <p:nvSpPr>
-          <p:cNvPr id="111" name="Google Shape;111;g3d40fca4b17_0_49:notes"/>
+          <p:cNvPr id="114" name="Google Shape;114;g3d40fca4b17_0_49:notes"/>
           <p:cNvSpPr txBox="1"/>
           <p:nvPr>
             <p:ph idx="1" type="body"/>
@@ -899,7 +904,7 @@
   <p:cSld>
     <p:spTree>
       <p:nvGrpSpPr>
-        <p:cNvPr id="122" name="Shape 122"/>
+        <p:cNvPr id="125" name="Shape 125"/>
         <p:cNvGrpSpPr/>
         <p:nvPr/>
       </p:nvGrpSpPr>
@@ -913,7 +918,7 @@
       </p:grpSpPr>
       <p:sp>
         <p:nvSpPr>
-          <p:cNvPr id="123" name="Google Shape;123;g3d40fca4b17_0_61:notes"/>
+          <p:cNvPr id="126" name="Google Shape;126;g3d40fca4b17_0_61:notes"/>
           <p:cNvSpPr/>
           <p:nvPr>
             <p:ph idx="2" type="sldImg"/>
@@ -948,7 +953,502 @@
       </p:sp>
       <p:sp>
         <p:nvSpPr>
-          <p:cNvPr id="124" name="Google Shape;124;g3d40fca4b17_0_61:notes"/>
+          <p:cNvPr id="127" name="Google Shape;127;g3d40fca4b17_0_61:notes"/>
+          <p:cNvSpPr txBox="1"/>
+          <p:nvPr>
+            <p:ph idx="1" type="body"/>
+          </p:nvPr>
+        </p:nvSpPr>
+        <p:spPr>
+          <a:xfrm>
+            <a:off x="685800" y="4343400"/>
+            <a:ext cx="5486400" cy="4114800"/>
+          </a:xfrm>
+          <a:prstGeom prst="rect">
+            <a:avLst/>
+          </a:prstGeom>
+        </p:spPr>
+        <p:txBody>
+          <a:bodyPr anchorCtr="0" anchor="t" bIns="91425" lIns="91425" spcFirstLastPara="1" rIns="91425" wrap="square" tIns="91425">
+            <a:noAutofit/>
+          </a:bodyPr>
+          <a:lstStyle/>
+          <a:p>
+            <a:pPr indent="0" lvl="0" marL="0" rtl="0" algn="l">
+              <a:spcBef>
+                <a:spcPts val="0"/>
+              </a:spcBef>
+              <a:spcAft>
+                <a:spcPts val="0"/>
+              </a:spcAft>
+              <a:buNone/>
+            </a:pPr>
+            <a:r>
+              <a:t/>
+            </a:r>
+            <a:endParaRPr/>
+          </a:p>
+        </p:txBody>
+      </p:sp>
+    </p:spTree>
+  </p:cSld>
+  <p:clrMapOvr>
+    <a:masterClrMapping/>
+  </p:clrMapOvr>
+</p:notes>
+</file>
+
+<file path=ppt/notesSlides/notesSlide12.xml><?xml version="1.0" encoding="utf-8"?>
+<p:notes xmlns:a="http://schemas.openxmlformats.org/drawingml/2006/main" xmlns:r="http://schemas.openxmlformats.org/officeDocument/2006/relationships" xmlns:mc="http://schemas.openxmlformats.org/markup-compatibility/2006" xmlns:mv="urn:schemas-microsoft-com:mac:vml" xmlns:p="http://schemas.openxmlformats.org/presentationml/2006/main" xmlns:c="http://schemas.openxmlformats.org/drawingml/2006/chart" xmlns:dgm="http://schemas.openxmlformats.org/drawingml/2006/diagram" xmlns:o="urn:schemas-microsoft-com:office:office" xmlns:v="urn:schemas-microsoft-com:vml" xmlns:pvml="urn:schemas-microsoft-com:office:powerpoint" xmlns:com="http://schemas.openxmlformats.org/drawingml/2006/compatibility" xmlns:p14="http://schemas.microsoft.com/office/powerpoint/2010/main" xmlns:p15="http://schemas.microsoft.com/office/powerpoint/2012/main" xmlns:ahyp="http://schemas.microsoft.com/office/drawing/2018/hyperlinkcolor" showMasterPhAnim="0" showMasterSp="0">
+  <p:cSld>
+    <p:spTree>
+      <p:nvGrpSpPr>
+        <p:cNvPr id="146" name="Shape 146"/>
+        <p:cNvGrpSpPr/>
+        <p:nvPr/>
+      </p:nvGrpSpPr>
+      <p:grpSpPr>
+        <a:xfrm>
+          <a:off x="0" y="0"/>
+          <a:ext cx="0" cy="0"/>
+          <a:chOff x="0" y="0"/>
+          <a:chExt cx="0" cy="0"/>
+        </a:xfrm>
+      </p:grpSpPr>
+      <p:sp>
+        <p:nvSpPr>
+          <p:cNvPr id="147" name="Google Shape;147;g396f637be96_1_29:notes"/>
+          <p:cNvSpPr/>
+          <p:nvPr>
+            <p:ph idx="2" type="sldImg"/>
+          </p:nvPr>
+        </p:nvSpPr>
+        <p:spPr>
+          <a:xfrm>
+            <a:off x="381300" y="685800"/>
+            <a:ext cx="6096000" cy="3429000"/>
+          </a:xfrm>
+          <a:custGeom>
+            <a:rect b="b" l="l" r="r" t="t"/>
+            <a:pathLst>
+              <a:path extrusionOk="0" h="120000" w="120000">
+                <a:moveTo>
+                  <a:pt x="0" y="0"/>
+                </a:moveTo>
+                <a:lnTo>
+                  <a:pt x="120000" y="0"/>
+                </a:lnTo>
+                <a:lnTo>
+                  <a:pt x="120000" y="120000"/>
+                </a:lnTo>
+                <a:lnTo>
+                  <a:pt x="0" y="120000"/>
+                </a:lnTo>
+                <a:close/>
+              </a:path>
+            </a:pathLst>
+          </a:custGeom>
+        </p:spPr>
+      </p:sp>
+      <p:sp>
+        <p:nvSpPr>
+          <p:cNvPr id="148" name="Google Shape;148;g396f637be96_1_29:notes"/>
+          <p:cNvSpPr txBox="1"/>
+          <p:nvPr>
+            <p:ph idx="1" type="body"/>
+          </p:nvPr>
+        </p:nvSpPr>
+        <p:spPr>
+          <a:xfrm>
+            <a:off x="685800" y="4343400"/>
+            <a:ext cx="5486400" cy="4114800"/>
+          </a:xfrm>
+          <a:prstGeom prst="rect">
+            <a:avLst/>
+          </a:prstGeom>
+        </p:spPr>
+        <p:txBody>
+          <a:bodyPr anchorCtr="0" anchor="t" bIns="91425" lIns="91425" spcFirstLastPara="1" rIns="91425" wrap="square" tIns="91425">
+            <a:noAutofit/>
+          </a:bodyPr>
+          <a:lstStyle/>
+          <a:p>
+            <a:pPr indent="0" lvl="0" marL="0" rtl="0" algn="l">
+              <a:spcBef>
+                <a:spcPts val="0"/>
+              </a:spcBef>
+              <a:spcAft>
+                <a:spcPts val="0"/>
+              </a:spcAft>
+              <a:buNone/>
+            </a:pPr>
+            <a:r>
+              <a:t/>
+            </a:r>
+            <a:endParaRPr/>
+          </a:p>
+        </p:txBody>
+      </p:sp>
+    </p:spTree>
+  </p:cSld>
+  <p:clrMapOvr>
+    <a:masterClrMapping/>
+  </p:clrMapOvr>
+</p:notes>
+</file>
+
+<file path=ppt/notesSlides/notesSlide13.xml><?xml version="1.0" encoding="utf-8"?>
+<p:notes xmlns:a="http://schemas.openxmlformats.org/drawingml/2006/main" xmlns:r="http://schemas.openxmlformats.org/officeDocument/2006/relationships" xmlns:mc="http://schemas.openxmlformats.org/markup-compatibility/2006" xmlns:mv="urn:schemas-microsoft-com:mac:vml" xmlns:p="http://schemas.openxmlformats.org/presentationml/2006/main" xmlns:c="http://schemas.openxmlformats.org/drawingml/2006/chart" xmlns:dgm="http://schemas.openxmlformats.org/drawingml/2006/diagram" xmlns:o="urn:schemas-microsoft-com:office:office" xmlns:v="urn:schemas-microsoft-com:vml" xmlns:pvml="urn:schemas-microsoft-com:office:powerpoint" xmlns:com="http://schemas.openxmlformats.org/drawingml/2006/compatibility" xmlns:p14="http://schemas.microsoft.com/office/powerpoint/2010/main" xmlns:p15="http://schemas.microsoft.com/office/powerpoint/2012/main" xmlns:ahyp="http://schemas.microsoft.com/office/drawing/2018/hyperlinkcolor" showMasterPhAnim="0" showMasterSp="0">
+  <p:cSld>
+    <p:spTree>
+      <p:nvGrpSpPr>
+        <p:cNvPr id="157" name="Shape 157"/>
+        <p:cNvGrpSpPr/>
+        <p:nvPr/>
+      </p:nvGrpSpPr>
+      <p:grpSpPr>
+        <a:xfrm>
+          <a:off x="0" y="0"/>
+          <a:ext cx="0" cy="0"/>
+          <a:chOff x="0" y="0"/>
+          <a:chExt cx="0" cy="0"/>
+        </a:xfrm>
+      </p:grpSpPr>
+      <p:sp>
+        <p:nvSpPr>
+          <p:cNvPr id="158" name="Google Shape;158;g396f637be96_1_40:notes"/>
+          <p:cNvSpPr/>
+          <p:nvPr>
+            <p:ph idx="2" type="sldImg"/>
+          </p:nvPr>
+        </p:nvSpPr>
+        <p:spPr>
+          <a:xfrm>
+            <a:off x="381300" y="685800"/>
+            <a:ext cx="6096000" cy="3429000"/>
+          </a:xfrm>
+          <a:custGeom>
+            <a:rect b="b" l="l" r="r" t="t"/>
+            <a:pathLst>
+              <a:path extrusionOk="0" h="120000" w="120000">
+                <a:moveTo>
+                  <a:pt x="0" y="0"/>
+                </a:moveTo>
+                <a:lnTo>
+                  <a:pt x="120000" y="0"/>
+                </a:lnTo>
+                <a:lnTo>
+                  <a:pt x="120000" y="120000"/>
+                </a:lnTo>
+                <a:lnTo>
+                  <a:pt x="0" y="120000"/>
+                </a:lnTo>
+                <a:close/>
+              </a:path>
+            </a:pathLst>
+          </a:custGeom>
+        </p:spPr>
+      </p:sp>
+      <p:sp>
+        <p:nvSpPr>
+          <p:cNvPr id="159" name="Google Shape;159;g396f637be96_1_40:notes"/>
+          <p:cNvSpPr txBox="1"/>
+          <p:nvPr>
+            <p:ph idx="1" type="body"/>
+          </p:nvPr>
+        </p:nvSpPr>
+        <p:spPr>
+          <a:xfrm>
+            <a:off x="685800" y="4343400"/>
+            <a:ext cx="5486400" cy="4114800"/>
+          </a:xfrm>
+          <a:prstGeom prst="rect">
+            <a:avLst/>
+          </a:prstGeom>
+        </p:spPr>
+        <p:txBody>
+          <a:bodyPr anchorCtr="0" anchor="t" bIns="91425" lIns="91425" spcFirstLastPara="1" rIns="91425" wrap="square" tIns="91425">
+            <a:noAutofit/>
+          </a:bodyPr>
+          <a:lstStyle/>
+          <a:p>
+            <a:pPr indent="0" lvl="0" marL="0" rtl="0" algn="l">
+              <a:spcBef>
+                <a:spcPts val="0"/>
+              </a:spcBef>
+              <a:spcAft>
+                <a:spcPts val="0"/>
+              </a:spcAft>
+              <a:buNone/>
+            </a:pPr>
+            <a:r>
+              <a:t/>
+            </a:r>
+            <a:endParaRPr/>
+          </a:p>
+        </p:txBody>
+      </p:sp>
+    </p:spTree>
+  </p:cSld>
+  <p:clrMapOvr>
+    <a:masterClrMapping/>
+  </p:clrMapOvr>
+</p:notes>
+</file>
+
+<file path=ppt/notesSlides/notesSlide14.xml><?xml version="1.0" encoding="utf-8"?>
+<p:notes xmlns:a="http://schemas.openxmlformats.org/drawingml/2006/main" xmlns:r="http://schemas.openxmlformats.org/officeDocument/2006/relationships" xmlns:mc="http://schemas.openxmlformats.org/markup-compatibility/2006" xmlns:mv="urn:schemas-microsoft-com:mac:vml" xmlns:p="http://schemas.openxmlformats.org/presentationml/2006/main" xmlns:c="http://schemas.openxmlformats.org/drawingml/2006/chart" xmlns:dgm="http://schemas.openxmlformats.org/drawingml/2006/diagram" xmlns:o="urn:schemas-microsoft-com:office:office" xmlns:v="urn:schemas-microsoft-com:vml" xmlns:pvml="urn:schemas-microsoft-com:office:powerpoint" xmlns:com="http://schemas.openxmlformats.org/drawingml/2006/compatibility" xmlns:p14="http://schemas.microsoft.com/office/powerpoint/2010/main" xmlns:p15="http://schemas.microsoft.com/office/powerpoint/2012/main" xmlns:ahyp="http://schemas.microsoft.com/office/drawing/2018/hyperlinkcolor" showMasterPhAnim="0" showMasterSp="0">
+  <p:cSld>
+    <p:spTree>
+      <p:nvGrpSpPr>
+        <p:cNvPr id="165" name="Shape 165"/>
+        <p:cNvGrpSpPr/>
+        <p:nvPr/>
+      </p:nvGrpSpPr>
+      <p:grpSpPr>
+        <a:xfrm>
+          <a:off x="0" y="0"/>
+          <a:ext cx="0" cy="0"/>
+          <a:chOff x="0" y="0"/>
+          <a:chExt cx="0" cy="0"/>
+        </a:xfrm>
+      </p:grpSpPr>
+      <p:sp>
+        <p:nvSpPr>
+          <p:cNvPr id="166" name="Google Shape;166;g396f637be96_1_46:notes"/>
+          <p:cNvSpPr/>
+          <p:nvPr>
+            <p:ph idx="2" type="sldImg"/>
+          </p:nvPr>
+        </p:nvSpPr>
+        <p:spPr>
+          <a:xfrm>
+            <a:off x="381300" y="685800"/>
+            <a:ext cx="6096000" cy="3429000"/>
+          </a:xfrm>
+          <a:custGeom>
+            <a:rect b="b" l="l" r="r" t="t"/>
+            <a:pathLst>
+              <a:path extrusionOk="0" h="120000" w="120000">
+                <a:moveTo>
+                  <a:pt x="0" y="0"/>
+                </a:moveTo>
+                <a:lnTo>
+                  <a:pt x="120000" y="0"/>
+                </a:lnTo>
+                <a:lnTo>
+                  <a:pt x="120000" y="120000"/>
+                </a:lnTo>
+                <a:lnTo>
+                  <a:pt x="0" y="120000"/>
+                </a:lnTo>
+                <a:close/>
+              </a:path>
+            </a:pathLst>
+          </a:custGeom>
+        </p:spPr>
+      </p:sp>
+      <p:sp>
+        <p:nvSpPr>
+          <p:cNvPr id="167" name="Google Shape;167;g396f637be96_1_46:notes"/>
+          <p:cNvSpPr txBox="1"/>
+          <p:nvPr>
+            <p:ph idx="1" type="body"/>
+          </p:nvPr>
+        </p:nvSpPr>
+        <p:spPr>
+          <a:xfrm>
+            <a:off x="685800" y="4343400"/>
+            <a:ext cx="5486400" cy="4114800"/>
+          </a:xfrm>
+          <a:prstGeom prst="rect">
+            <a:avLst/>
+          </a:prstGeom>
+        </p:spPr>
+        <p:txBody>
+          <a:bodyPr anchorCtr="0" anchor="t" bIns="91425" lIns="91425" spcFirstLastPara="1" rIns="91425" wrap="square" tIns="91425">
+            <a:noAutofit/>
+          </a:bodyPr>
+          <a:lstStyle/>
+          <a:p>
+            <a:pPr indent="0" lvl="0" marL="0" rtl="0" algn="l">
+              <a:spcBef>
+                <a:spcPts val="0"/>
+              </a:spcBef>
+              <a:spcAft>
+                <a:spcPts val="0"/>
+              </a:spcAft>
+              <a:buNone/>
+            </a:pPr>
+            <a:r>
+              <a:t/>
+            </a:r>
+            <a:endParaRPr/>
+          </a:p>
+        </p:txBody>
+      </p:sp>
+    </p:spTree>
+  </p:cSld>
+  <p:clrMapOvr>
+    <a:masterClrMapping/>
+  </p:clrMapOvr>
+</p:notes>
+</file>
+
+<file path=ppt/notesSlides/notesSlide15.xml><?xml version="1.0" encoding="utf-8"?>
+<p:notes xmlns:a="http://schemas.openxmlformats.org/drawingml/2006/main" xmlns:r="http://schemas.openxmlformats.org/officeDocument/2006/relationships" xmlns:mc="http://schemas.openxmlformats.org/markup-compatibility/2006" xmlns:mv="urn:schemas-microsoft-com:mac:vml" xmlns:p="http://schemas.openxmlformats.org/presentationml/2006/main" xmlns:c="http://schemas.openxmlformats.org/drawingml/2006/chart" xmlns:dgm="http://schemas.openxmlformats.org/drawingml/2006/diagram" xmlns:o="urn:schemas-microsoft-com:office:office" xmlns:v="urn:schemas-microsoft-com:vml" xmlns:pvml="urn:schemas-microsoft-com:office:powerpoint" xmlns:com="http://schemas.openxmlformats.org/drawingml/2006/compatibility" xmlns:p14="http://schemas.microsoft.com/office/powerpoint/2010/main" xmlns:p15="http://schemas.microsoft.com/office/powerpoint/2012/main" xmlns:ahyp="http://schemas.microsoft.com/office/drawing/2018/hyperlinkcolor" showMasterPhAnim="0" showMasterSp="0">
+  <p:cSld>
+    <p:spTree>
+      <p:nvGrpSpPr>
+        <p:cNvPr id="174" name="Shape 174"/>
+        <p:cNvGrpSpPr/>
+        <p:nvPr/>
+      </p:nvGrpSpPr>
+      <p:grpSpPr>
+        <a:xfrm>
+          <a:off x="0" y="0"/>
+          <a:ext cx="0" cy="0"/>
+          <a:chOff x="0" y="0"/>
+          <a:chExt cx="0" cy="0"/>
+        </a:xfrm>
+      </p:grpSpPr>
+      <p:sp>
+        <p:nvSpPr>
+          <p:cNvPr id="175" name="Google Shape;175;g3d4e059728b_0_6:notes"/>
+          <p:cNvSpPr/>
+          <p:nvPr>
+            <p:ph idx="2" type="sldImg"/>
+          </p:nvPr>
+        </p:nvSpPr>
+        <p:spPr>
+          <a:xfrm>
+            <a:off x="381300" y="685800"/>
+            <a:ext cx="6096000" cy="3429000"/>
+          </a:xfrm>
+          <a:custGeom>
+            <a:rect b="b" l="l" r="r" t="t"/>
+            <a:pathLst>
+              <a:path extrusionOk="0" h="120000" w="120000">
+                <a:moveTo>
+                  <a:pt x="0" y="0"/>
+                </a:moveTo>
+                <a:lnTo>
+                  <a:pt x="120000" y="0"/>
+                </a:lnTo>
+                <a:lnTo>
+                  <a:pt x="120000" y="120000"/>
+                </a:lnTo>
+                <a:lnTo>
+                  <a:pt x="0" y="120000"/>
+                </a:lnTo>
+                <a:close/>
+              </a:path>
+            </a:pathLst>
+          </a:custGeom>
+        </p:spPr>
+      </p:sp>
+      <p:sp>
+        <p:nvSpPr>
+          <p:cNvPr id="176" name="Google Shape;176;g3d4e059728b_0_6:notes"/>
+          <p:cNvSpPr txBox="1"/>
+          <p:nvPr>
+            <p:ph idx="1" type="body"/>
+          </p:nvPr>
+        </p:nvSpPr>
+        <p:spPr>
+          <a:xfrm>
+            <a:off x="685800" y="4343400"/>
+            <a:ext cx="5486400" cy="4114800"/>
+          </a:xfrm>
+          <a:prstGeom prst="rect">
+            <a:avLst/>
+          </a:prstGeom>
+        </p:spPr>
+        <p:txBody>
+          <a:bodyPr anchorCtr="0" anchor="t" bIns="91425" lIns="91425" spcFirstLastPara="1" rIns="91425" wrap="square" tIns="91425">
+            <a:noAutofit/>
+          </a:bodyPr>
+          <a:lstStyle/>
+          <a:p>
+            <a:pPr indent="0" lvl="0" marL="0" rtl="0" algn="l">
+              <a:spcBef>
+                <a:spcPts val="0"/>
+              </a:spcBef>
+              <a:spcAft>
+                <a:spcPts val="0"/>
+              </a:spcAft>
+              <a:buNone/>
+            </a:pPr>
+            <a:r>
+              <a:t/>
+            </a:r>
+            <a:endParaRPr/>
+          </a:p>
+        </p:txBody>
+      </p:sp>
+    </p:spTree>
+  </p:cSld>
+  <p:clrMapOvr>
+    <a:masterClrMapping/>
+  </p:clrMapOvr>
+</p:notes>
+</file>
+
+<file path=ppt/notesSlides/notesSlide16.xml><?xml version="1.0" encoding="utf-8"?>
+<p:notes xmlns:a="http://schemas.openxmlformats.org/drawingml/2006/main" xmlns:r="http://schemas.openxmlformats.org/officeDocument/2006/relationships" xmlns:mc="http://schemas.openxmlformats.org/markup-compatibility/2006" xmlns:mv="urn:schemas-microsoft-com:mac:vml" xmlns:p="http://schemas.openxmlformats.org/presentationml/2006/main" xmlns:c="http://schemas.openxmlformats.org/drawingml/2006/chart" xmlns:dgm="http://schemas.openxmlformats.org/drawingml/2006/diagram" xmlns:o="urn:schemas-microsoft-com:office:office" xmlns:v="urn:schemas-microsoft-com:vml" xmlns:pvml="urn:schemas-microsoft-com:office:powerpoint" xmlns:com="http://schemas.openxmlformats.org/drawingml/2006/compatibility" xmlns:p14="http://schemas.microsoft.com/office/powerpoint/2010/main" xmlns:p15="http://schemas.microsoft.com/office/powerpoint/2012/main" xmlns:ahyp="http://schemas.microsoft.com/office/drawing/2018/hyperlinkcolor" showMasterPhAnim="0" showMasterSp="0">
+  <p:cSld>
+    <p:spTree>
+      <p:nvGrpSpPr>
+        <p:cNvPr id="210" name="Shape 210"/>
+        <p:cNvGrpSpPr/>
+        <p:nvPr/>
+      </p:nvGrpSpPr>
+      <p:grpSpPr>
+        <a:xfrm>
+          <a:off x="0" y="0"/>
+          <a:ext cx="0" cy="0"/>
+          <a:chOff x="0" y="0"/>
+          <a:chExt cx="0" cy="0"/>
+        </a:xfrm>
+      </p:grpSpPr>
+      <p:sp>
+        <p:nvSpPr>
+          <p:cNvPr id="211" name="Google Shape;211;g3d4e059728b_0_0:notes"/>
+          <p:cNvSpPr/>
+          <p:nvPr>
+            <p:ph idx="2" type="sldImg"/>
+          </p:nvPr>
+        </p:nvSpPr>
+        <p:spPr>
+          <a:xfrm>
+            <a:off x="381300" y="685800"/>
+            <a:ext cx="6096000" cy="3429000"/>
+          </a:xfrm>
+          <a:custGeom>
+            <a:rect b="b" l="l" r="r" t="t"/>
+            <a:pathLst>
+              <a:path extrusionOk="0" h="120000" w="120000">
+                <a:moveTo>
+                  <a:pt x="0" y="0"/>
+                </a:moveTo>
+                <a:lnTo>
+                  <a:pt x="120000" y="0"/>
+                </a:lnTo>
+                <a:lnTo>
+                  <a:pt x="120000" y="120000"/>
+                </a:lnTo>
+                <a:lnTo>
+                  <a:pt x="0" y="120000"/>
+                </a:lnTo>
+                <a:close/>
+              </a:path>
+            </a:pathLst>
+          </a:custGeom>
+        </p:spPr>
+      </p:sp>
+      <p:sp>
+        <p:nvSpPr>
+          <p:cNvPr id="212" name="Google Shape;212;g3d4e059728b_0_0:notes"/>
           <p:cNvSpPr txBox="1"/>
           <p:nvPr>
             <p:ph idx="1" type="body"/>
@@ -1196,7 +1696,7 @@
   <p:cSld>
     <p:spTree>
       <p:nvGrpSpPr>
-        <p:cNvPr id="73" name="Shape 73"/>
+        <p:cNvPr id="76" name="Shape 76"/>
         <p:cNvGrpSpPr/>
         <p:nvPr/>
       </p:nvGrpSpPr>
@@ -1210,7 +1710,7 @@
       </p:grpSpPr>
       <p:sp>
         <p:nvSpPr>
-          <p:cNvPr id="74" name="Google Shape;74;g3d40fca4b17_0_18:notes"/>
+          <p:cNvPr id="77" name="Google Shape;77;g3d40fca4b17_0_18:notes"/>
           <p:cNvSpPr/>
           <p:nvPr>
             <p:ph idx="2" type="sldImg"/>
@@ -1245,7 +1745,7 @@
       </p:sp>
       <p:sp>
         <p:nvSpPr>
-          <p:cNvPr id="75" name="Google Shape;75;g3d40fca4b17_0_18:notes"/>
+          <p:cNvPr id="78" name="Google Shape;78;g3d40fca4b17_0_18:notes"/>
           <p:cNvSpPr txBox="1"/>
           <p:nvPr>
             <p:ph idx="1" type="body"/>
@@ -1295,7 +1795,7 @@
   <p:cSld>
     <p:spTree>
       <p:nvGrpSpPr>
-        <p:cNvPr id="79" name="Shape 79"/>
+        <p:cNvPr id="82" name="Shape 82"/>
         <p:cNvGrpSpPr/>
         <p:nvPr/>
       </p:nvGrpSpPr>
@@ -1309,7 +1809,7 @@
       </p:grpSpPr>
       <p:sp>
         <p:nvSpPr>
-          <p:cNvPr id="80" name="Google Shape;80;g3d40fca4b17_0_23:notes"/>
+          <p:cNvPr id="83" name="Google Shape;83;g3d40fca4b17_0_23:notes"/>
           <p:cNvSpPr/>
           <p:nvPr>
             <p:ph idx="2" type="sldImg"/>
@@ -1344,7 +1844,7 @@
       </p:sp>
       <p:sp>
         <p:nvSpPr>
-          <p:cNvPr id="81" name="Google Shape;81;g3d40fca4b17_0_23:notes"/>
+          <p:cNvPr id="84" name="Google Shape;84;g3d40fca4b17_0_23:notes"/>
           <p:cNvSpPr txBox="1"/>
           <p:nvPr>
             <p:ph idx="1" type="body"/>
@@ -1394,7 +1894,7 @@
   <p:cSld>
     <p:spTree>
       <p:nvGrpSpPr>
-        <p:cNvPr id="85" name="Shape 85"/>
+        <p:cNvPr id="88" name="Shape 88"/>
         <p:cNvGrpSpPr/>
         <p:nvPr/>
       </p:nvGrpSpPr>
@@ -1408,7 +1908,7 @@
       </p:grpSpPr>
       <p:sp>
         <p:nvSpPr>
-          <p:cNvPr id="86" name="Google Shape;86;g3d40fca4b17_0_28:notes"/>
+          <p:cNvPr id="89" name="Google Shape;89;g3d40fca4b17_0_28:notes"/>
           <p:cNvSpPr/>
           <p:nvPr>
             <p:ph idx="2" type="sldImg"/>
@@ -1443,7 +1943,7 @@
       </p:sp>
       <p:sp>
         <p:nvSpPr>
-          <p:cNvPr id="87" name="Google Shape;87;g3d40fca4b17_0_28:notes"/>
+          <p:cNvPr id="90" name="Google Shape;90;g3d40fca4b17_0_28:notes"/>
           <p:cNvSpPr txBox="1"/>
           <p:nvPr>
             <p:ph idx="1" type="body"/>
@@ -1493,7 +1993,7 @@
   <p:cSld>
     <p:spTree>
       <p:nvGrpSpPr>
-        <p:cNvPr id="91" name="Shape 91"/>
+        <p:cNvPr id="94" name="Shape 94"/>
         <p:cNvGrpSpPr/>
         <p:nvPr/>
       </p:nvGrpSpPr>
@@ -1507,7 +2007,7 @@
       </p:grpSpPr>
       <p:sp>
         <p:nvSpPr>
-          <p:cNvPr id="92" name="Google Shape;92;g3d40fca4b17_0_33:notes"/>
+          <p:cNvPr id="95" name="Google Shape;95;g3d40fca4b17_0_33:notes"/>
           <p:cNvSpPr/>
           <p:nvPr>
             <p:ph idx="2" type="sldImg"/>
@@ -1542,7 +2042,7 @@
       </p:sp>
       <p:sp>
         <p:nvSpPr>
-          <p:cNvPr id="93" name="Google Shape;93;g3d40fca4b17_0_33:notes"/>
+          <p:cNvPr id="96" name="Google Shape;96;g3d40fca4b17_0_33:notes"/>
           <p:cNvSpPr txBox="1"/>
           <p:nvPr>
             <p:ph idx="1" type="body"/>
@@ -1592,7 +2092,7 @@
   <p:cSld>
     <p:spTree>
       <p:nvGrpSpPr>
-        <p:cNvPr id="97" name="Shape 97"/>
+        <p:cNvPr id="100" name="Shape 100"/>
         <p:cNvGrpSpPr/>
         <p:nvPr/>
       </p:nvGrpSpPr>
@@ -1606,7 +2106,7 @@
       </p:grpSpPr>
       <p:sp>
         <p:nvSpPr>
-          <p:cNvPr id="98" name="Google Shape;98;g3d40fca4b17_0_39:notes"/>
+          <p:cNvPr id="101" name="Google Shape;101;g3d40fca4b17_0_39:notes"/>
           <p:cNvSpPr/>
           <p:nvPr>
             <p:ph idx="2" type="sldImg"/>
@@ -1641,7 +2141,7 @@
       </p:sp>
       <p:sp>
         <p:nvSpPr>
-          <p:cNvPr id="99" name="Google Shape;99;g3d40fca4b17_0_39:notes"/>
+          <p:cNvPr id="102" name="Google Shape;102;g3d40fca4b17_0_39:notes"/>
           <p:cNvSpPr txBox="1"/>
           <p:nvPr>
             <p:ph idx="1" type="body"/>
@@ -1691,7 +2191,7 @@
   <p:cSld>
     <p:spTree>
       <p:nvGrpSpPr>
-        <p:cNvPr id="103" name="Shape 103"/>
+        <p:cNvPr id="106" name="Shape 106"/>
         <p:cNvGrpSpPr/>
         <p:nvPr/>
       </p:nvGrpSpPr>
@@ -1705,7 +2205,7 @@
       </p:grpSpPr>
       <p:sp>
         <p:nvSpPr>
-          <p:cNvPr id="104" name="Google Shape;104;g3d40fca4b17_0_44:notes"/>
+          <p:cNvPr id="107" name="Google Shape;107;g3d40fca4b17_0_44:notes"/>
           <p:cNvSpPr/>
           <p:nvPr>
             <p:ph idx="2" type="sldImg"/>
@@ -1740,7 +2240,7 @@
       </p:sp>
       <p:sp>
         <p:nvSpPr>
-          <p:cNvPr id="105" name="Google Shape;105;g3d40fca4b17_0_44:notes"/>
+          <p:cNvPr id="108" name="Google Shape;108;g3d40fca4b17_0_44:notes"/>
           <p:cNvSpPr txBox="1"/>
           <p:nvPr>
             <p:ph idx="1" type="body"/>
@@ -6560,7 +7060,7 @@
   <p:cSld>
     <p:spTree>
       <p:nvGrpSpPr>
-        <p:cNvPr id="112" name="Shape 112"/>
+        <p:cNvPr id="115" name="Shape 115"/>
         <p:cNvGrpSpPr/>
         <p:nvPr/>
       </p:nvGrpSpPr>
@@ -6574,7 +7074,7 @@
       </p:grpSpPr>
       <p:sp>
         <p:nvSpPr>
-          <p:cNvPr id="113" name="Google Shape;113;p22"/>
+          <p:cNvPr id="116" name="Google Shape;116;p22"/>
           <p:cNvSpPr txBox="1"/>
           <p:nvPr>
             <p:ph type="title"/>
@@ -6614,7 +7114,7 @@
       </p:sp>
       <p:sp>
         <p:nvSpPr>
-          <p:cNvPr id="114" name="Google Shape;114;p22"/>
+          <p:cNvPr id="117" name="Google Shape;117;p22"/>
           <p:cNvSpPr txBox="1"/>
           <p:nvPr>
             <p:ph idx="1" type="body"/>
@@ -6654,7 +7154,7 @@
       </p:sp>
       <p:sp>
         <p:nvSpPr>
-          <p:cNvPr id="115" name="Google Shape;115;p22"/>
+          <p:cNvPr id="118" name="Google Shape;118;p22"/>
           <p:cNvSpPr/>
           <p:nvPr/>
         </p:nvSpPr>
@@ -6706,7 +7206,7 @@
       </p:sp>
       <p:sp>
         <p:nvSpPr>
-          <p:cNvPr id="116" name="Google Shape;116;p22"/>
+          <p:cNvPr id="119" name="Google Shape;119;p22"/>
           <p:cNvSpPr txBox="1"/>
           <p:nvPr/>
         </p:nvSpPr>
@@ -6780,7 +7280,7 @@
       </p:sp>
       <p:sp>
         <p:nvSpPr>
-          <p:cNvPr id="117" name="Google Shape;117;p22"/>
+          <p:cNvPr id="120" name="Google Shape;120;p22"/>
           <p:cNvSpPr txBox="1"/>
           <p:nvPr/>
         </p:nvSpPr>
@@ -6854,7 +7354,7 @@
       </p:sp>
       <p:sp>
         <p:nvSpPr>
-          <p:cNvPr id="118" name="Google Shape;118;p22"/>
+          <p:cNvPr id="121" name="Google Shape;121;p22"/>
           <p:cNvSpPr txBox="1"/>
           <p:nvPr/>
         </p:nvSpPr>
@@ -6904,7 +7404,7 @@
       </p:sp>
       <p:sp>
         <p:nvSpPr>
-          <p:cNvPr id="119" name="Google Shape;119;p22"/>
+          <p:cNvPr id="122" name="Google Shape;122;p22"/>
           <p:cNvSpPr/>
           <p:nvPr/>
         </p:nvSpPr>
@@ -6956,7 +7456,7 @@
       </p:sp>
       <p:sp>
         <p:nvSpPr>
-          <p:cNvPr id="120" name="Google Shape;120;p22"/>
+          <p:cNvPr id="123" name="Google Shape;123;p22"/>
           <p:cNvSpPr/>
           <p:nvPr/>
         </p:nvSpPr>
@@ -7008,7 +7508,7 @@
       </p:sp>
       <p:sp>
         <p:nvSpPr>
-          <p:cNvPr id="121" name="Google Shape;121;p22"/>
+          <p:cNvPr id="124" name="Google Shape;124;p22"/>
           <p:cNvSpPr txBox="1"/>
           <p:nvPr>
             <p:ph idx="1" type="body"/>
@@ -7075,7 +7575,7 @@
   <p:cSld>
     <p:spTree>
       <p:nvGrpSpPr>
-        <p:cNvPr id="125" name="Shape 125"/>
+        <p:cNvPr id="128" name="Shape 128"/>
         <p:cNvGrpSpPr/>
         <p:nvPr/>
       </p:nvGrpSpPr>
@@ -7089,7 +7589,7 @@
       </p:grpSpPr>
       <p:sp>
         <p:nvSpPr>
-          <p:cNvPr id="126" name="Google Shape;126;p23"/>
+          <p:cNvPr id="129" name="Google Shape;129;p23"/>
           <p:cNvSpPr txBox="1"/>
           <p:nvPr>
             <p:ph type="title"/>
@@ -7129,7 +7629,7 @@
       </p:sp>
       <p:sp>
         <p:nvSpPr>
-          <p:cNvPr id="127" name="Google Shape;127;p23"/>
+          <p:cNvPr id="130" name="Google Shape;130;p23"/>
           <p:cNvSpPr txBox="1"/>
           <p:nvPr>
             <p:ph idx="1" type="body"/>
@@ -7201,7 +7701,7 @@
       </p:sp>
       <p:sp>
         <p:nvSpPr>
-          <p:cNvPr id="128" name="Google Shape;128;p23"/>
+          <p:cNvPr id="131" name="Google Shape;131;p23"/>
           <p:cNvSpPr/>
           <p:nvPr/>
         </p:nvSpPr>
@@ -7253,14 +7753,14 @@
       </p:sp>
       <p:sp>
         <p:nvSpPr>
-          <p:cNvPr id="129" name="Google Shape;129;p23"/>
+          <p:cNvPr id="132" name="Google Shape;132;p23"/>
           <p:cNvSpPr txBox="1"/>
           <p:nvPr/>
         </p:nvSpPr>
         <p:spPr>
           <a:xfrm>
             <a:off x="5162748" y="4280125"/>
-            <a:ext cx="2178600" cy="461700"/>
+            <a:ext cx="2178600" cy="738900"/>
           </a:xfrm>
           <a:prstGeom prst="rect">
             <a:avLst/>
@@ -7291,7 +7791,7 @@
                   <a:schemeClr val="dk2"/>
                 </a:solidFill>
               </a:rPr>
-              <a:t>CLS + input tokens</a:t>
+              <a:t>CLS + input tokens + SEP</a:t>
             </a:r>
             <a:endParaRPr sz="1800">
               <a:solidFill>
@@ -7303,7 +7803,7 @@
       </p:sp>
       <p:sp>
         <p:nvSpPr>
-          <p:cNvPr id="130" name="Google Shape;130;p23"/>
+          <p:cNvPr id="133" name="Google Shape;133;p23"/>
           <p:cNvSpPr txBox="1"/>
           <p:nvPr/>
         </p:nvSpPr>
@@ -7383,7 +7883,7 @@
       </p:sp>
       <p:sp>
         <p:nvSpPr>
-          <p:cNvPr id="131" name="Google Shape;131;p23"/>
+          <p:cNvPr id="134" name="Google Shape;134;p23"/>
           <p:cNvSpPr txBox="1"/>
           <p:nvPr/>
         </p:nvSpPr>
@@ -7433,7 +7933,7 @@
       </p:sp>
       <p:sp>
         <p:nvSpPr>
-          <p:cNvPr id="132" name="Google Shape;132;p23"/>
+          <p:cNvPr id="135" name="Google Shape;135;p23"/>
           <p:cNvSpPr/>
           <p:nvPr/>
         </p:nvSpPr>
@@ -7485,7 +7985,7 @@
       </p:sp>
       <p:sp>
         <p:nvSpPr>
-          <p:cNvPr id="133" name="Google Shape;133;p23"/>
+          <p:cNvPr id="136" name="Google Shape;136;p23"/>
           <p:cNvSpPr/>
           <p:nvPr/>
         </p:nvSpPr>
@@ -7537,7 +8037,7 @@
       </p:sp>
       <p:sp>
         <p:nvSpPr>
-          <p:cNvPr id="134" name="Google Shape;134;p23"/>
+          <p:cNvPr id="137" name="Google Shape;137;p23"/>
           <p:cNvSpPr txBox="1"/>
           <p:nvPr/>
         </p:nvSpPr>
@@ -7593,7 +8093,7 @@
       </p:sp>
       <p:sp>
         <p:nvSpPr>
-          <p:cNvPr id="135" name="Google Shape;135;p23"/>
+          <p:cNvPr id="138" name="Google Shape;138;p23"/>
           <p:cNvSpPr txBox="1"/>
           <p:nvPr/>
         </p:nvSpPr>
@@ -7643,7 +8143,7 @@
       </p:sp>
       <p:sp>
         <p:nvSpPr>
-          <p:cNvPr id="136" name="Google Shape;136;p23"/>
+          <p:cNvPr id="139" name="Google Shape;139;p23"/>
           <p:cNvSpPr/>
           <p:nvPr/>
         </p:nvSpPr>
@@ -7695,7 +8195,7 @@
       </p:sp>
       <p:sp>
         <p:nvSpPr>
-          <p:cNvPr id="137" name="Google Shape;137;p23"/>
+          <p:cNvPr id="140" name="Google Shape;140;p23"/>
           <p:cNvSpPr/>
           <p:nvPr/>
         </p:nvSpPr>
@@ -7747,10 +8247,10 @@
       </p:sp>
       <p:cxnSp>
         <p:nvCxnSpPr>
-          <p:cNvPr id="138" name="Google Shape;138;p23"/>
+          <p:cNvPr id="141" name="Google Shape;141;p23"/>
           <p:cNvCxnSpPr>
-            <a:stCxn id="130" idx="0"/>
-            <a:endCxn id="136" idx="2"/>
+            <a:stCxn id="133" idx="0"/>
+            <a:endCxn id="139" idx="2"/>
           </p:cNvCxnSpPr>
           <p:nvPr/>
         </p:nvCxnSpPr>
@@ -7776,10 +8276,10 @@
       </p:cxnSp>
       <p:cxnSp>
         <p:nvCxnSpPr>
-          <p:cNvPr id="139" name="Google Shape;139;p23"/>
+          <p:cNvPr id="142" name="Google Shape;142;p23"/>
           <p:cNvCxnSpPr>
-            <a:stCxn id="136" idx="0"/>
-            <a:endCxn id="137" idx="2"/>
+            <a:stCxn id="139" idx="0"/>
+            <a:endCxn id="140" idx="2"/>
           </p:cNvCxnSpPr>
           <p:nvPr/>
         </p:nvCxnSpPr>
@@ -7805,7 +8305,7 @@
       </p:cxnSp>
       <p:sp>
         <p:nvSpPr>
-          <p:cNvPr id="140" name="Google Shape;140;p23"/>
+          <p:cNvPr id="143" name="Google Shape;143;p23"/>
           <p:cNvSpPr txBox="1"/>
           <p:nvPr/>
         </p:nvSpPr>
@@ -7855,10 +8355,10 @@
       </p:sp>
       <p:cxnSp>
         <p:nvCxnSpPr>
-          <p:cNvPr id="141" name="Google Shape;141;p23"/>
+          <p:cNvPr id="144" name="Google Shape;144;p23"/>
           <p:cNvCxnSpPr>
-            <a:stCxn id="140" idx="1"/>
-            <a:endCxn id="137" idx="3"/>
+            <a:stCxn id="143" idx="1"/>
+            <a:endCxn id="140" idx="3"/>
           </p:cNvCxnSpPr>
           <p:nvPr/>
         </p:nvCxnSpPr>
@@ -7884,7 +8384,7 @@
       </p:cxnSp>
       <p:sp>
         <p:nvSpPr>
-          <p:cNvPr id="142" name="Google Shape;142;p23"/>
+          <p:cNvPr id="145" name="Google Shape;145;p23"/>
           <p:cNvSpPr txBox="1"/>
           <p:nvPr/>
         </p:nvSpPr>
@@ -7932,6 +8432,2708 @@
           </a:p>
         </p:txBody>
       </p:sp>
+    </p:spTree>
+  </p:cSld>
+  <p:clrMapOvr>
+    <a:masterClrMapping/>
+  </p:clrMapOvr>
+</p:sld>
+</file>
+
+<file path=ppt/slides/slide12.xml><?xml version="1.0" encoding="utf-8"?>
+<p:sld xmlns:a="http://schemas.openxmlformats.org/drawingml/2006/main" xmlns:r="http://schemas.openxmlformats.org/officeDocument/2006/relationships" xmlns:mc="http://schemas.openxmlformats.org/markup-compatibility/2006" xmlns:mv="urn:schemas-microsoft-com:mac:vml" xmlns:p="http://schemas.openxmlformats.org/presentationml/2006/main" xmlns:c="http://schemas.openxmlformats.org/drawingml/2006/chart" xmlns:dgm="http://schemas.openxmlformats.org/drawingml/2006/diagram" xmlns:o="urn:schemas-microsoft-com:office:office" xmlns:v="urn:schemas-microsoft-com:vml" xmlns:pvml="urn:schemas-microsoft-com:office:powerpoint" xmlns:com="http://schemas.openxmlformats.org/drawingml/2006/compatibility" xmlns:p14="http://schemas.microsoft.com/office/powerpoint/2010/main" xmlns:p15="http://schemas.microsoft.com/office/powerpoint/2012/main" xmlns:ahyp="http://schemas.microsoft.com/office/drawing/2018/hyperlinkcolor">
+  <p:cSld>
+    <p:spTree>
+      <p:nvGrpSpPr>
+        <p:cNvPr id="149" name="Shape 149"/>
+        <p:cNvGrpSpPr/>
+        <p:nvPr/>
+      </p:nvGrpSpPr>
+      <p:grpSpPr>
+        <a:xfrm>
+          <a:off x="0" y="0"/>
+          <a:ext cx="0" cy="0"/>
+          <a:chOff x="0" y="0"/>
+          <a:chExt cx="0" cy="0"/>
+        </a:xfrm>
+      </p:grpSpPr>
+      <p:sp>
+        <p:nvSpPr>
+          <p:cNvPr id="150" name="Google Shape;150;p24"/>
+          <p:cNvSpPr txBox="1"/>
+          <p:nvPr>
+            <p:ph type="title"/>
+          </p:nvPr>
+        </p:nvSpPr>
+        <p:spPr>
+          <a:xfrm>
+            <a:off x="311700" y="445025"/>
+            <a:ext cx="8520600" cy="572700"/>
+          </a:xfrm>
+          <a:prstGeom prst="rect">
+            <a:avLst/>
+          </a:prstGeom>
+        </p:spPr>
+        <p:txBody>
+          <a:bodyPr anchorCtr="0" anchor="t" bIns="91425" lIns="91425" spcFirstLastPara="1" rIns="91425" wrap="square" tIns="91425">
+            <a:normAutofit fontScale="90000"/>
+          </a:bodyPr>
+          <a:lstStyle/>
+          <a:p>
+            <a:pPr indent="0" lvl="0" marL="0" rtl="0" algn="l">
+              <a:spcBef>
+                <a:spcPts val="0"/>
+              </a:spcBef>
+              <a:spcAft>
+                <a:spcPts val="0"/>
+              </a:spcAft>
+              <a:buNone/>
+            </a:pPr>
+            <a:r>
+              <a:rPr lang="en"/>
+              <a:t>Decoder-only (Generative) models</a:t>
+            </a:r>
+            <a:endParaRPr/>
+          </a:p>
+        </p:txBody>
+      </p:sp>
+      <p:sp>
+        <p:nvSpPr>
+          <p:cNvPr id="151" name="Google Shape;151;p24"/>
+          <p:cNvSpPr txBox="1"/>
+          <p:nvPr>
+            <p:ph idx="1" type="body"/>
+          </p:nvPr>
+        </p:nvSpPr>
+        <p:spPr>
+          <a:xfrm>
+            <a:off x="311700" y="1152475"/>
+            <a:ext cx="8520600" cy="1508700"/>
+          </a:xfrm>
+          <a:prstGeom prst="rect">
+            <a:avLst/>
+          </a:prstGeom>
+        </p:spPr>
+        <p:txBody>
+          <a:bodyPr anchorCtr="0" anchor="t" bIns="91425" lIns="91425" spcFirstLastPara="1" rIns="91425" wrap="square" tIns="91425">
+            <a:normAutofit/>
+          </a:bodyPr>
+          <a:lstStyle/>
+          <a:p>
+            <a:pPr indent="0" lvl="0" marL="0" rtl="0" algn="l">
+              <a:spcBef>
+                <a:spcPts val="0"/>
+              </a:spcBef>
+              <a:spcAft>
+                <a:spcPts val="0"/>
+              </a:spcAft>
+              <a:buNone/>
+            </a:pPr>
+            <a:r>
+              <a:rPr lang="en" sz="1600"/>
+              <a:t>Key idea: Given some text, predict what follows</a:t>
+            </a:r>
+            <a:endParaRPr sz="1600"/>
+          </a:p>
+          <a:p>
+            <a:pPr indent="0" lvl="0" marL="0" rtl="0" algn="l">
+              <a:spcBef>
+                <a:spcPts val="1200"/>
+              </a:spcBef>
+              <a:spcAft>
+                <a:spcPts val="0"/>
+              </a:spcAft>
+              <a:buNone/>
+            </a:pPr>
+            <a:r>
+              <a:rPr lang="en" sz="1600"/>
+              <a:t>Input: the, quick, brown, fox</a:t>
+            </a:r>
+            <a:endParaRPr sz="1600"/>
+          </a:p>
+          <a:p>
+            <a:pPr indent="0" lvl="0" marL="0" rtl="0" algn="l">
+              <a:spcBef>
+                <a:spcPts val="1200"/>
+              </a:spcBef>
+              <a:spcAft>
+                <a:spcPts val="1200"/>
+              </a:spcAft>
+              <a:buNone/>
+            </a:pPr>
+            <a:r>
+              <a:rPr lang="en" sz="1600"/>
+              <a:t>One plausible output: jumps, over, the.. </a:t>
+            </a:r>
+            <a:endParaRPr sz="1600"/>
+          </a:p>
+        </p:txBody>
+      </p:sp>
+      <p:pic>
+        <p:nvPicPr>
+          <p:cNvPr descr="{&quot;code&quot;:&quot;\\begin{gather*}\n{\\text{Bayes}\\;\\text{rule}}\\\\\n{P\\left(x_{1},\\,x_{2}\\right)=P\\left(x_{2}|x_{1}\\right)P\\left(x_{1}\\right)}\\\\\n{P\\left(x_{1},x_{2},x_{3}...x_{n}\\right)=}\\\\\n{P\\left(x_{n}|x_{n-1}...x_{1}\\right)P\\left(x_{n-1}|x_{n-2}...x_{1}\\right)\\,...P\\left(x_{2}|x_{1}\\right)P\\left(x_{1}\\right)}\\\\\n{\\text{If}\\;\\text{the}\\;\\text{input}\\;\\text{tokens}\\;\\text{are}\\;x_{1}...x_{M},\\,\\text{and}\\;\\text{output}\\;\\text{tokens:}\\;y_{1}...y_{T}\\text{}}\\\\\n{\\text{Then:}}\\\\\n{P\\left(y_{1}...y_{T}|x_{1}...x_{M}\\right)=P\\left(y_{1}|x_{1}...x_{M}\\right)P\\left(y_{2}|y_{1,}x_{1}...x_{M}\\right)...p\\left(y_{T}|y_{T-1}...y_{1},x_{1}...x_{M}\\right)}\t\n\\end{gather*}&quot;,&quot;aid&quot;:null,&quot;type&quot;:&quot;gather*&quot;,&quot;font&quot;:{&quot;family&quot;:&quot;Arial&quot;,&quot;size&quot;:14.5,&quot;color&quot;:&quot;#595959&quot;},&quot;id&quot;:&quot;1&quot;,&quot;backgroundColorModified&quot;:false,&quot;backgroundColor&quot;:&quot;#FFFFFF&quot;,&quot;ts&quot;:1775784172784,&quot;cs&quot;:&quot;w77MoLgL/yjlSogZQnt1ag==&quot;,&quot;size&quot;:{&quot;width&quot;:846.7507170603675,&quot;height&quot;:200.37534278215222}}" id="152" name="Google Shape;152;p24"/>
+          <p:cNvPicPr preferRelativeResize="0"/>
+          <p:nvPr/>
+        </p:nvPicPr>
+        <p:blipFill>
+          <a:blip r:embed="rId3">
+            <a:alphaModFix/>
+          </a:blip>
+          <a:stretch>
+            <a:fillRect/>
+          </a:stretch>
+        </p:blipFill>
+        <p:spPr>
+          <a:xfrm>
+            <a:off x="446250" y="2525425"/>
+            <a:ext cx="8065301" cy="1908575"/>
+          </a:xfrm>
+          <a:prstGeom prst="rect">
+            <a:avLst/>
+          </a:prstGeom>
+          <a:noFill/>
+          <a:ln>
+            <a:noFill/>
+          </a:ln>
+        </p:spPr>
+      </p:pic>
+      <p:sp>
+        <p:nvSpPr>
+          <p:cNvPr id="153" name="Google Shape;153;p24"/>
+          <p:cNvSpPr txBox="1"/>
+          <p:nvPr>
+            <p:ph idx="1" type="body"/>
+          </p:nvPr>
+        </p:nvSpPr>
+        <p:spPr>
+          <a:xfrm>
+            <a:off x="446250" y="4463775"/>
+            <a:ext cx="845700" cy="516900"/>
+          </a:xfrm>
+          <a:prstGeom prst="rect">
+            <a:avLst/>
+          </a:prstGeom>
+        </p:spPr>
+        <p:txBody>
+          <a:bodyPr anchorCtr="0" anchor="t" bIns="91425" lIns="91425" spcFirstLastPara="1" rIns="91425" wrap="square" tIns="91425">
+            <a:normAutofit fontScale="77500" lnSpcReduction="20000"/>
+          </a:bodyPr>
+          <a:lstStyle/>
+          <a:p>
+            <a:pPr indent="0" lvl="0" marL="0" rtl="0" algn="ctr">
+              <a:spcBef>
+                <a:spcPts val="0"/>
+              </a:spcBef>
+              <a:spcAft>
+                <a:spcPts val="1200"/>
+              </a:spcAft>
+              <a:buNone/>
+            </a:pPr>
+            <a:r>
+              <a:rPr lang="en" sz="1400"/>
+              <a:t>Predicted tokens</a:t>
+            </a:r>
+            <a:endParaRPr sz="1400"/>
+          </a:p>
+        </p:txBody>
+      </p:sp>
+      <p:sp>
+        <p:nvSpPr>
+          <p:cNvPr id="154" name="Google Shape;154;p24"/>
+          <p:cNvSpPr txBox="1"/>
+          <p:nvPr>
+            <p:ph idx="1" type="body"/>
+          </p:nvPr>
+        </p:nvSpPr>
+        <p:spPr>
+          <a:xfrm>
+            <a:off x="1402325" y="4463775"/>
+            <a:ext cx="845700" cy="516900"/>
+          </a:xfrm>
+          <a:prstGeom prst="rect">
+            <a:avLst/>
+          </a:prstGeom>
+        </p:spPr>
+        <p:txBody>
+          <a:bodyPr anchorCtr="0" anchor="t" bIns="91425" lIns="91425" spcFirstLastPara="1" rIns="91425" wrap="square" tIns="91425">
+            <a:normAutofit fontScale="77500" lnSpcReduction="20000"/>
+          </a:bodyPr>
+          <a:lstStyle/>
+          <a:p>
+            <a:pPr indent="0" lvl="0" marL="0" rtl="0" algn="ctr">
+              <a:spcBef>
+                <a:spcPts val="0"/>
+              </a:spcBef>
+              <a:spcAft>
+                <a:spcPts val="1200"/>
+              </a:spcAft>
+              <a:buNone/>
+            </a:pPr>
+            <a:r>
+              <a:rPr lang="en" sz="1400"/>
+              <a:t>Input </a:t>
+            </a:r>
+            <a:r>
+              <a:rPr lang="en" sz="1400"/>
+              <a:t>tokens</a:t>
+            </a:r>
+            <a:endParaRPr sz="1400"/>
+          </a:p>
+        </p:txBody>
+      </p:sp>
+      <p:sp>
+        <p:nvSpPr>
+          <p:cNvPr id="155" name="Google Shape;155;p24"/>
+          <p:cNvSpPr txBox="1"/>
+          <p:nvPr>
+            <p:ph idx="1" type="body"/>
+          </p:nvPr>
+        </p:nvSpPr>
+        <p:spPr>
+          <a:xfrm>
+            <a:off x="2864400" y="4519550"/>
+            <a:ext cx="845700" cy="516900"/>
+          </a:xfrm>
+          <a:prstGeom prst="rect">
+            <a:avLst/>
+          </a:prstGeom>
+        </p:spPr>
+        <p:txBody>
+          <a:bodyPr anchorCtr="0" anchor="t" bIns="91425" lIns="91425" spcFirstLastPara="1" rIns="91425" wrap="square" tIns="91425">
+            <a:normAutofit fontScale="62500"/>
+          </a:bodyPr>
+          <a:lstStyle/>
+          <a:p>
+            <a:pPr indent="0" lvl="0" marL="0" rtl="0" algn="ctr">
+              <a:spcBef>
+                <a:spcPts val="0"/>
+              </a:spcBef>
+              <a:spcAft>
+                <a:spcPts val="1200"/>
+              </a:spcAft>
+              <a:buNone/>
+            </a:pPr>
+            <a:r>
+              <a:rPr lang="en" sz="1400"/>
+              <a:t>Predict first output token</a:t>
+            </a:r>
+            <a:endParaRPr sz="1400"/>
+          </a:p>
+        </p:txBody>
+      </p:sp>
+      <p:sp>
+        <p:nvSpPr>
+          <p:cNvPr id="156" name="Google Shape;156;p24"/>
+          <p:cNvSpPr txBox="1"/>
+          <p:nvPr>
+            <p:ph idx="1" type="body"/>
+          </p:nvPr>
+        </p:nvSpPr>
+        <p:spPr>
+          <a:xfrm>
+            <a:off x="4165750" y="4474850"/>
+            <a:ext cx="1602900" cy="606300"/>
+          </a:xfrm>
+          <a:prstGeom prst="rect">
+            <a:avLst/>
+          </a:prstGeom>
+        </p:spPr>
+        <p:txBody>
+          <a:bodyPr anchorCtr="0" anchor="t" bIns="91425" lIns="91425" spcFirstLastPara="1" rIns="91425" wrap="square" tIns="91425">
+            <a:normAutofit fontScale="62500" lnSpcReduction="10000"/>
+          </a:bodyPr>
+          <a:lstStyle/>
+          <a:p>
+            <a:pPr indent="0" lvl="0" marL="0" rtl="0" algn="ctr">
+              <a:spcBef>
+                <a:spcPts val="0"/>
+              </a:spcBef>
+              <a:spcAft>
+                <a:spcPts val="1200"/>
+              </a:spcAft>
+              <a:buNone/>
+            </a:pPr>
+            <a:r>
+              <a:rPr lang="en" sz="1400"/>
+              <a:t>Add the predicted token to the input context and predict the second token</a:t>
+            </a:r>
+            <a:endParaRPr sz="1400"/>
+          </a:p>
+        </p:txBody>
+      </p:sp>
+    </p:spTree>
+  </p:cSld>
+  <p:clrMapOvr>
+    <a:masterClrMapping/>
+  </p:clrMapOvr>
+</p:sld>
+</file>
+
+<file path=ppt/slides/slide13.xml><?xml version="1.0" encoding="utf-8"?>
+<p:sld xmlns:a="http://schemas.openxmlformats.org/drawingml/2006/main" xmlns:r="http://schemas.openxmlformats.org/officeDocument/2006/relationships" xmlns:mc="http://schemas.openxmlformats.org/markup-compatibility/2006" xmlns:mv="urn:schemas-microsoft-com:mac:vml" xmlns:p="http://schemas.openxmlformats.org/presentationml/2006/main" xmlns:c="http://schemas.openxmlformats.org/drawingml/2006/chart" xmlns:dgm="http://schemas.openxmlformats.org/drawingml/2006/diagram" xmlns:o="urn:schemas-microsoft-com:office:office" xmlns:v="urn:schemas-microsoft-com:vml" xmlns:pvml="urn:schemas-microsoft-com:office:powerpoint" xmlns:com="http://schemas.openxmlformats.org/drawingml/2006/compatibility" xmlns:p14="http://schemas.microsoft.com/office/powerpoint/2010/main" xmlns:p15="http://schemas.microsoft.com/office/powerpoint/2012/main" xmlns:ahyp="http://schemas.microsoft.com/office/drawing/2018/hyperlinkcolor">
+  <p:cSld>
+    <p:spTree>
+      <p:nvGrpSpPr>
+        <p:cNvPr id="160" name="Shape 160"/>
+        <p:cNvGrpSpPr/>
+        <p:nvPr/>
+      </p:nvGrpSpPr>
+      <p:grpSpPr>
+        <a:xfrm>
+          <a:off x="0" y="0"/>
+          <a:ext cx="0" cy="0"/>
+          <a:chOff x="0" y="0"/>
+          <a:chExt cx="0" cy="0"/>
+        </a:xfrm>
+      </p:grpSpPr>
+      <p:sp>
+        <p:nvSpPr>
+          <p:cNvPr id="161" name="Google Shape;161;p25"/>
+          <p:cNvSpPr txBox="1"/>
+          <p:nvPr>
+            <p:ph type="title"/>
+          </p:nvPr>
+        </p:nvSpPr>
+        <p:spPr>
+          <a:xfrm>
+            <a:off x="311700" y="445025"/>
+            <a:ext cx="8520600" cy="572700"/>
+          </a:xfrm>
+          <a:prstGeom prst="rect">
+            <a:avLst/>
+          </a:prstGeom>
+        </p:spPr>
+        <p:txBody>
+          <a:bodyPr anchorCtr="0" anchor="t" bIns="91425" lIns="91425" spcFirstLastPara="1" rIns="91425" wrap="square" tIns="91425">
+            <a:normAutofit fontScale="90000"/>
+          </a:bodyPr>
+          <a:lstStyle/>
+          <a:p>
+            <a:pPr indent="0" lvl="0" marL="0" rtl="0" algn="l">
+              <a:spcBef>
+                <a:spcPts val="0"/>
+              </a:spcBef>
+              <a:spcAft>
+                <a:spcPts val="0"/>
+              </a:spcAft>
+              <a:buClr>
+                <a:schemeClr val="dk1"/>
+              </a:buClr>
+              <a:buSzPct val="39286"/>
+              <a:buFont typeface="Arial"/>
+              <a:buNone/>
+            </a:pPr>
+            <a:r>
+              <a:rPr lang="en"/>
+              <a:t>Decoder-only (Generative) models</a:t>
+            </a:r>
+            <a:endParaRPr/>
+          </a:p>
+        </p:txBody>
+      </p:sp>
+      <p:sp>
+        <p:nvSpPr>
+          <p:cNvPr id="162" name="Google Shape;162;p25"/>
+          <p:cNvSpPr txBox="1"/>
+          <p:nvPr>
+            <p:ph idx="1" type="body"/>
+          </p:nvPr>
+        </p:nvSpPr>
+        <p:spPr>
+          <a:xfrm>
+            <a:off x="311700" y="1152475"/>
+            <a:ext cx="8520600" cy="1925400"/>
+          </a:xfrm>
+          <a:prstGeom prst="rect">
+            <a:avLst/>
+          </a:prstGeom>
+        </p:spPr>
+        <p:txBody>
+          <a:bodyPr anchorCtr="0" anchor="t" bIns="91425" lIns="91425" spcFirstLastPara="1" rIns="91425" wrap="square" tIns="91425">
+            <a:normAutofit/>
+          </a:bodyPr>
+          <a:lstStyle/>
+          <a:p>
+            <a:pPr indent="0" lvl="0" marL="0" rtl="0" algn="l">
+              <a:lnSpc>
+                <a:spcPct val="100000"/>
+              </a:lnSpc>
+              <a:spcBef>
+                <a:spcPts val="0"/>
+              </a:spcBef>
+              <a:spcAft>
+                <a:spcPts val="0"/>
+              </a:spcAft>
+              <a:buNone/>
+            </a:pPr>
+            <a:r>
+              <a:rPr lang="en" sz="1500"/>
+              <a:t>Key idea: The model needs to learn to assign higher probabilities to more plausible input sequences  </a:t>
+            </a:r>
+            <a:endParaRPr sz="1300">
+              <a:solidFill>
+                <a:srgbClr val="000000"/>
+              </a:solidFill>
+            </a:endParaRPr>
+          </a:p>
+          <a:p>
+            <a:pPr indent="0" lvl="0" marL="0" rtl="0" algn="l">
+              <a:spcBef>
+                <a:spcPts val="0"/>
+              </a:spcBef>
+              <a:spcAft>
+                <a:spcPts val="0"/>
+              </a:spcAft>
+              <a:buNone/>
+            </a:pPr>
+            <a:r>
+              <a:rPr lang="en" sz="1500"/>
+              <a:t>P(model, needs, to, learn) &gt; P(needs, learns, model, to)</a:t>
+            </a:r>
+            <a:endParaRPr sz="1500"/>
+          </a:p>
+          <a:p>
+            <a:pPr indent="0" lvl="0" marL="0" rtl="0" algn="l">
+              <a:spcBef>
+                <a:spcPts val="1200"/>
+              </a:spcBef>
+              <a:spcAft>
+                <a:spcPts val="1200"/>
+              </a:spcAft>
+              <a:buNone/>
+            </a:pPr>
+            <a:r>
+              <a:rPr lang="en" sz="1500"/>
+              <a:t>Like BERT, the training signal is inherent in the token sequence. How do we utilize this in a generative context? </a:t>
+            </a:r>
+            <a:endParaRPr sz="1500"/>
+          </a:p>
+        </p:txBody>
+      </p:sp>
+      <p:pic>
+        <p:nvPicPr>
+          <p:cNvPr descr="{&quot;type&quot;:&quot;gather*&quot;,&quot;backgroundColor&quot;:&quot;#FFFFFF&quot;,&quot;id&quot;:&quot;2&quot;,&quot;backgroundColorModified&quot;:false,&quot;code&quot;:&quot;\\begin{gather*}\n{P\\left(y_{1},\\,y_{2},\\,y_{3},\\,y_{4}\\right)=P\\left(\\giventhat{y_{4}}{y_{3},y_{2},y_{1}}\\right)P\\left(\\giventhat{y_{3}}{y_{2},y_{1}}\\right)P\\left(\\giventhat{y_{2}}{y_{1}}\\right)P\\left(y_{1}\\right)}\\\\\n{\\log_{}P\\left(y_{1},\\,y_{2},\\,y_{3},\\,y_{4}\\right)=\\log_{}P\\left(\\giventhat{y_{4}}{y_{3},y_{2},y_{1}}\\right)+\\log_{}P\\left(\\giventhat{y_{3}}{y_{2},y_{1}}\\right)+\\log_{}P\\left(\\giventhat{y_{2}}{y_{1}}\\right)+\\log_{}P\\left(y_{1}\\right)}\t\n\\end{gather*}&quot;,&quot;font&quot;:{&quot;color&quot;:&quot;#000000&quot;,&quot;family&quot;:&quot;Arial&quot;,&quot;size&quot;:12},&quot;aid&quot;:null,&quot;ts&quot;:1775821950711,&quot;cs&quot;:&quot;yLTGIMf/rFnCZCzF3pXQZw==&quot;,&quot;size&quot;:{&quot;width&quot;:732,&quot;height&quot;:43.5}}" id="163" name="Google Shape;163;p25"/>
+          <p:cNvPicPr preferRelativeResize="0"/>
+          <p:nvPr/>
+        </p:nvPicPr>
+        <p:blipFill>
+          <a:blip r:embed="rId3">
+            <a:alphaModFix/>
+          </a:blip>
+          <a:stretch>
+            <a:fillRect/>
+          </a:stretch>
+        </p:blipFill>
+        <p:spPr>
+          <a:xfrm>
+            <a:off x="994200" y="2897960"/>
+            <a:ext cx="6972300" cy="414338"/>
+          </a:xfrm>
+          <a:prstGeom prst="rect">
+            <a:avLst/>
+          </a:prstGeom>
+          <a:noFill/>
+          <a:ln>
+            <a:noFill/>
+          </a:ln>
+        </p:spPr>
+      </p:pic>
+      <p:sp>
+        <p:nvSpPr>
+          <p:cNvPr id="164" name="Google Shape;164;p25"/>
+          <p:cNvSpPr txBox="1"/>
+          <p:nvPr/>
+        </p:nvSpPr>
+        <p:spPr>
+          <a:xfrm>
+            <a:off x="1476400" y="3780250"/>
+            <a:ext cx="6060300" cy="738900"/>
+          </a:xfrm>
+          <a:prstGeom prst="rect">
+            <a:avLst/>
+          </a:prstGeom>
+          <a:noFill/>
+          <a:ln>
+            <a:noFill/>
+          </a:ln>
+        </p:spPr>
+        <p:txBody>
+          <a:bodyPr anchorCtr="0" anchor="t" bIns="91425" lIns="91425" spcFirstLastPara="1" rIns="91425" wrap="square" tIns="91425">
+            <a:spAutoFit/>
+          </a:bodyPr>
+          <a:lstStyle/>
+          <a:p>
+            <a:pPr indent="0" lvl="0" marL="0" rtl="0" algn="l">
+              <a:spcBef>
+                <a:spcPts val="0"/>
+              </a:spcBef>
+              <a:spcAft>
+                <a:spcPts val="0"/>
+              </a:spcAft>
+              <a:buNone/>
+            </a:pPr>
+            <a:r>
+              <a:rPr lang="en" sz="1800">
+                <a:solidFill>
+                  <a:schemeClr val="dk2"/>
+                </a:solidFill>
+              </a:rPr>
+              <a:t>To do this, each token must only see the tokens before it.. This is implemented using a causal attention mask</a:t>
+            </a:r>
+            <a:endParaRPr sz="1800">
+              <a:solidFill>
+                <a:schemeClr val="dk2"/>
+              </a:solidFill>
+            </a:endParaRPr>
+          </a:p>
+        </p:txBody>
+      </p:sp>
+    </p:spTree>
+  </p:cSld>
+  <p:clrMapOvr>
+    <a:masterClrMapping/>
+  </p:clrMapOvr>
+</p:sld>
+</file>
+
+<file path=ppt/slides/slide14.xml><?xml version="1.0" encoding="utf-8"?>
+<p:sld xmlns:a="http://schemas.openxmlformats.org/drawingml/2006/main" xmlns:r="http://schemas.openxmlformats.org/officeDocument/2006/relationships" xmlns:mc="http://schemas.openxmlformats.org/markup-compatibility/2006" xmlns:mv="urn:schemas-microsoft-com:mac:vml" xmlns:p="http://schemas.openxmlformats.org/presentationml/2006/main" xmlns:c="http://schemas.openxmlformats.org/drawingml/2006/chart" xmlns:dgm="http://schemas.openxmlformats.org/drawingml/2006/diagram" xmlns:o="urn:schemas-microsoft-com:office:office" xmlns:v="urn:schemas-microsoft-com:vml" xmlns:pvml="urn:schemas-microsoft-com:office:powerpoint" xmlns:com="http://schemas.openxmlformats.org/drawingml/2006/compatibility" xmlns:p14="http://schemas.microsoft.com/office/powerpoint/2010/main" xmlns:p15="http://schemas.microsoft.com/office/powerpoint/2012/main" xmlns:ahyp="http://schemas.microsoft.com/office/drawing/2018/hyperlinkcolor">
+  <p:cSld>
+    <p:spTree>
+      <p:nvGrpSpPr>
+        <p:cNvPr id="168" name="Shape 168"/>
+        <p:cNvGrpSpPr/>
+        <p:nvPr/>
+      </p:nvGrpSpPr>
+      <p:grpSpPr>
+        <a:xfrm>
+          <a:off x="0" y="0"/>
+          <a:ext cx="0" cy="0"/>
+          <a:chOff x="0" y="0"/>
+          <a:chExt cx="0" cy="0"/>
+        </a:xfrm>
+      </p:grpSpPr>
+      <p:sp>
+        <p:nvSpPr>
+          <p:cNvPr id="169" name="Google Shape;169;p26"/>
+          <p:cNvSpPr txBox="1"/>
+          <p:nvPr>
+            <p:ph type="title"/>
+          </p:nvPr>
+        </p:nvSpPr>
+        <p:spPr>
+          <a:xfrm>
+            <a:off x="311700" y="445025"/>
+            <a:ext cx="8520600" cy="572700"/>
+          </a:xfrm>
+          <a:prstGeom prst="rect">
+            <a:avLst/>
+          </a:prstGeom>
+        </p:spPr>
+        <p:txBody>
+          <a:bodyPr anchorCtr="0" anchor="t" bIns="91425" lIns="91425" spcFirstLastPara="1" rIns="91425" wrap="square" tIns="91425">
+            <a:normAutofit fontScale="90000"/>
+          </a:bodyPr>
+          <a:lstStyle/>
+          <a:p>
+            <a:pPr indent="0" lvl="0" marL="0" rtl="0" algn="l">
+              <a:spcBef>
+                <a:spcPts val="0"/>
+              </a:spcBef>
+              <a:spcAft>
+                <a:spcPts val="0"/>
+              </a:spcAft>
+              <a:buNone/>
+            </a:pPr>
+            <a:r>
+              <a:rPr lang="en"/>
+              <a:t>Causal Attention Mask</a:t>
+            </a:r>
+            <a:endParaRPr/>
+          </a:p>
+        </p:txBody>
+      </p:sp>
+      <p:pic>
+        <p:nvPicPr>
+          <p:cNvPr id="170" name="Google Shape;170;p26"/>
+          <p:cNvPicPr preferRelativeResize="0"/>
+          <p:nvPr/>
+        </p:nvPicPr>
+        <p:blipFill>
+          <a:blip r:embed="rId3">
+            <a:alphaModFix/>
+          </a:blip>
+          <a:stretch>
+            <a:fillRect/>
+          </a:stretch>
+        </p:blipFill>
+        <p:spPr>
+          <a:xfrm>
+            <a:off x="152400" y="1170125"/>
+            <a:ext cx="4542218" cy="3973375"/>
+          </a:xfrm>
+          <a:prstGeom prst="rect">
+            <a:avLst/>
+          </a:prstGeom>
+          <a:noFill/>
+          <a:ln>
+            <a:noFill/>
+          </a:ln>
+        </p:spPr>
+      </p:pic>
+      <p:sp>
+        <p:nvSpPr>
+          <p:cNvPr id="171" name="Google Shape;171;p26"/>
+          <p:cNvSpPr txBox="1"/>
+          <p:nvPr/>
+        </p:nvSpPr>
+        <p:spPr>
+          <a:xfrm>
+            <a:off x="4694625" y="1875250"/>
+            <a:ext cx="4238700" cy="400200"/>
+          </a:xfrm>
+          <a:prstGeom prst="rect">
+            <a:avLst/>
+          </a:prstGeom>
+          <a:noFill/>
+          <a:ln>
+            <a:noFill/>
+          </a:ln>
+        </p:spPr>
+        <p:txBody>
+          <a:bodyPr anchorCtr="0" anchor="t" bIns="91425" lIns="91425" spcFirstLastPara="1" rIns="91425" wrap="square" tIns="91425">
+            <a:spAutoFit/>
+          </a:bodyPr>
+          <a:lstStyle/>
+          <a:p>
+            <a:pPr indent="0" lvl="0" marL="0" rtl="0" algn="l">
+              <a:spcBef>
+                <a:spcPts val="0"/>
+              </a:spcBef>
+              <a:spcAft>
+                <a:spcPts val="0"/>
+              </a:spcAft>
+              <a:buNone/>
+            </a:pPr>
+            <a:r>
+              <a:rPr lang="en">
+                <a:solidFill>
+                  <a:schemeClr val="dk2"/>
+                </a:solidFill>
+              </a:rPr>
+              <a:t>T0 only sees the keys corresponding to T0</a:t>
+            </a:r>
+            <a:endParaRPr>
+              <a:solidFill>
+                <a:schemeClr val="dk2"/>
+              </a:solidFill>
+            </a:endParaRPr>
+          </a:p>
+        </p:txBody>
+      </p:sp>
+      <p:sp>
+        <p:nvSpPr>
+          <p:cNvPr id="172" name="Google Shape;172;p26"/>
+          <p:cNvSpPr txBox="1"/>
+          <p:nvPr/>
+        </p:nvSpPr>
+        <p:spPr>
+          <a:xfrm>
+            <a:off x="4694625" y="2224125"/>
+            <a:ext cx="4238700" cy="400200"/>
+          </a:xfrm>
+          <a:prstGeom prst="rect">
+            <a:avLst/>
+          </a:prstGeom>
+          <a:noFill/>
+          <a:ln>
+            <a:noFill/>
+          </a:ln>
+        </p:spPr>
+        <p:txBody>
+          <a:bodyPr anchorCtr="0" anchor="t" bIns="91425" lIns="91425" spcFirstLastPara="1" rIns="91425" wrap="square" tIns="91425">
+            <a:spAutoFit/>
+          </a:bodyPr>
+          <a:lstStyle/>
+          <a:p>
+            <a:pPr indent="0" lvl="0" marL="0" rtl="0" algn="l">
+              <a:spcBef>
+                <a:spcPts val="0"/>
+              </a:spcBef>
+              <a:spcAft>
+                <a:spcPts val="0"/>
+              </a:spcAft>
+              <a:buNone/>
+            </a:pPr>
+            <a:r>
+              <a:rPr lang="en">
+                <a:solidFill>
+                  <a:schemeClr val="dk2"/>
+                </a:solidFill>
+              </a:rPr>
+              <a:t>T1 only sees the keys corresponding to T0, T1</a:t>
+            </a:r>
+            <a:endParaRPr>
+              <a:solidFill>
+                <a:schemeClr val="dk2"/>
+              </a:solidFill>
+            </a:endParaRPr>
+          </a:p>
+        </p:txBody>
+      </p:sp>
+      <p:sp>
+        <p:nvSpPr>
+          <p:cNvPr id="173" name="Google Shape;173;p26"/>
+          <p:cNvSpPr txBox="1"/>
+          <p:nvPr/>
+        </p:nvSpPr>
+        <p:spPr>
+          <a:xfrm>
+            <a:off x="4694625" y="2571750"/>
+            <a:ext cx="4238700" cy="400200"/>
+          </a:xfrm>
+          <a:prstGeom prst="rect">
+            <a:avLst/>
+          </a:prstGeom>
+          <a:noFill/>
+          <a:ln>
+            <a:noFill/>
+          </a:ln>
+        </p:spPr>
+        <p:txBody>
+          <a:bodyPr anchorCtr="0" anchor="t" bIns="91425" lIns="91425" spcFirstLastPara="1" rIns="91425" wrap="square" tIns="91425">
+            <a:spAutoFit/>
+          </a:bodyPr>
+          <a:lstStyle/>
+          <a:p>
+            <a:pPr indent="0" lvl="0" marL="0" rtl="0" algn="l">
+              <a:spcBef>
+                <a:spcPts val="0"/>
+              </a:spcBef>
+              <a:spcAft>
+                <a:spcPts val="0"/>
+              </a:spcAft>
+              <a:buNone/>
+            </a:pPr>
+            <a:r>
+              <a:rPr lang="en">
+                <a:solidFill>
+                  <a:schemeClr val="dk2"/>
+                </a:solidFill>
+              </a:rPr>
+              <a:t>T2 only sees the keys corresponding to T0, T1, T2</a:t>
+            </a:r>
+            <a:endParaRPr>
+              <a:solidFill>
+                <a:schemeClr val="dk2"/>
+              </a:solidFill>
+            </a:endParaRPr>
+          </a:p>
+        </p:txBody>
+      </p:sp>
+    </p:spTree>
+  </p:cSld>
+  <p:clrMapOvr>
+    <a:masterClrMapping/>
+  </p:clrMapOvr>
+</p:sld>
+</file>
+
+<file path=ppt/slides/slide15.xml><?xml version="1.0" encoding="utf-8"?>
+<p:sld xmlns:a="http://schemas.openxmlformats.org/drawingml/2006/main" xmlns:r="http://schemas.openxmlformats.org/officeDocument/2006/relationships" xmlns:mc="http://schemas.openxmlformats.org/markup-compatibility/2006" xmlns:mv="urn:schemas-microsoft-com:mac:vml" xmlns:p="http://schemas.openxmlformats.org/presentationml/2006/main" xmlns:c="http://schemas.openxmlformats.org/drawingml/2006/chart" xmlns:dgm="http://schemas.openxmlformats.org/drawingml/2006/diagram" xmlns:o="urn:schemas-microsoft-com:office:office" xmlns:v="urn:schemas-microsoft-com:vml" xmlns:pvml="urn:schemas-microsoft-com:office:powerpoint" xmlns:com="http://schemas.openxmlformats.org/drawingml/2006/compatibility" xmlns:p14="http://schemas.microsoft.com/office/powerpoint/2010/main" xmlns:p15="http://schemas.microsoft.com/office/powerpoint/2012/main" xmlns:ahyp="http://schemas.microsoft.com/office/drawing/2018/hyperlinkcolor">
+  <p:cSld>
+    <p:spTree>
+      <p:nvGrpSpPr>
+        <p:cNvPr id="177" name="Shape 177"/>
+        <p:cNvGrpSpPr/>
+        <p:nvPr/>
+      </p:nvGrpSpPr>
+      <p:grpSpPr>
+        <a:xfrm>
+          <a:off x="0" y="0"/>
+          <a:ext cx="0" cy="0"/>
+          <a:chOff x="0" y="0"/>
+          <a:chExt cx="0" cy="0"/>
+        </a:xfrm>
+      </p:grpSpPr>
+      <p:sp>
+        <p:nvSpPr>
+          <p:cNvPr id="178" name="Google Shape;178;p27"/>
+          <p:cNvSpPr txBox="1"/>
+          <p:nvPr>
+            <p:ph type="title"/>
+          </p:nvPr>
+        </p:nvSpPr>
+        <p:spPr>
+          <a:xfrm>
+            <a:off x="311700" y="445025"/>
+            <a:ext cx="8520600" cy="572700"/>
+          </a:xfrm>
+          <a:prstGeom prst="rect">
+            <a:avLst/>
+          </a:prstGeom>
+        </p:spPr>
+        <p:txBody>
+          <a:bodyPr anchorCtr="0" anchor="t" bIns="91425" lIns="91425" spcFirstLastPara="1" rIns="91425" wrap="square" tIns="91425">
+            <a:normAutofit fontScale="90000"/>
+          </a:bodyPr>
+          <a:lstStyle/>
+          <a:p>
+            <a:pPr indent="0" lvl="0" marL="0" rtl="0" algn="l">
+              <a:spcBef>
+                <a:spcPts val="0"/>
+              </a:spcBef>
+              <a:spcAft>
+                <a:spcPts val="0"/>
+              </a:spcAft>
+              <a:buNone/>
+            </a:pPr>
+            <a:r>
+              <a:rPr lang="en"/>
+              <a:t>Generative Model Architecture</a:t>
+            </a:r>
+            <a:endParaRPr/>
+          </a:p>
+        </p:txBody>
+      </p:sp>
+      <p:sp>
+        <p:nvSpPr>
+          <p:cNvPr id="179" name="Google Shape;179;p27"/>
+          <p:cNvSpPr/>
+          <p:nvPr/>
+        </p:nvSpPr>
+        <p:spPr>
+          <a:xfrm>
+            <a:off x="257652" y="2738325"/>
+            <a:ext cx="1385100" cy="724800"/>
+          </a:xfrm>
+          <a:prstGeom prst="roundRect">
+            <a:avLst>
+              <a:gd fmla="val 16667" name="adj"/>
+            </a:avLst>
+          </a:prstGeom>
+          <a:solidFill>
+            <a:schemeClr val="lt2"/>
+          </a:solidFill>
+          <a:ln cap="flat" cmpd="sng" w="9525">
+            <a:solidFill>
+              <a:schemeClr val="dk2"/>
+            </a:solidFill>
+            <a:prstDash val="solid"/>
+            <a:round/>
+            <a:headEnd len="sm" w="sm" type="none"/>
+            <a:tailEnd len="sm" w="sm" type="none"/>
+          </a:ln>
+        </p:spPr>
+        <p:txBody>
+          <a:bodyPr anchorCtr="0" anchor="ctr" bIns="91425" lIns="91425" spcFirstLastPara="1" rIns="91425" wrap="square" tIns="91425">
+            <a:noAutofit/>
+          </a:bodyPr>
+          <a:lstStyle/>
+          <a:p>
+            <a:pPr indent="0" lvl="0" marL="0" rtl="0" algn="ctr">
+              <a:spcBef>
+                <a:spcPts val="0"/>
+              </a:spcBef>
+              <a:spcAft>
+                <a:spcPts val="0"/>
+              </a:spcAft>
+              <a:buNone/>
+            </a:pPr>
+            <a:r>
+              <a:rPr lang="en"/>
+              <a:t>Transformer Block</a:t>
+            </a:r>
+            <a:endParaRPr/>
+          </a:p>
+        </p:txBody>
+      </p:sp>
+      <p:sp>
+        <p:nvSpPr>
+          <p:cNvPr id="180" name="Google Shape;180;p27"/>
+          <p:cNvSpPr txBox="1"/>
+          <p:nvPr/>
+        </p:nvSpPr>
+        <p:spPr>
+          <a:xfrm>
+            <a:off x="316948" y="3792000"/>
+            <a:ext cx="2178600" cy="461700"/>
+          </a:xfrm>
+          <a:prstGeom prst="rect">
+            <a:avLst/>
+          </a:prstGeom>
+          <a:noFill/>
+          <a:ln>
+            <a:noFill/>
+          </a:ln>
+        </p:spPr>
+        <p:txBody>
+          <a:bodyPr anchorCtr="0" anchor="t" bIns="91425" lIns="91425" spcFirstLastPara="1" rIns="91425" wrap="square" tIns="91425">
+            <a:spAutoFit/>
+          </a:bodyPr>
+          <a:lstStyle/>
+          <a:p>
+            <a:pPr indent="0" lvl="0" marL="0" rtl="0" algn="l">
+              <a:spcBef>
+                <a:spcPts val="0"/>
+              </a:spcBef>
+              <a:spcAft>
+                <a:spcPts val="0"/>
+              </a:spcAft>
+              <a:buNone/>
+            </a:pPr>
+            <a:r>
+              <a:rPr lang="en" sz="1800">
+                <a:solidFill>
+                  <a:schemeClr val="dk2"/>
+                </a:solidFill>
+              </a:rPr>
+              <a:t>I</a:t>
+            </a:r>
+            <a:r>
+              <a:rPr lang="en" sz="1800">
+                <a:solidFill>
+                  <a:schemeClr val="dk2"/>
+                </a:solidFill>
+              </a:rPr>
+              <a:t>nput tokens</a:t>
+            </a:r>
+            <a:endParaRPr sz="1800">
+              <a:solidFill>
+                <a:schemeClr val="dk2"/>
+              </a:solidFill>
+            </a:endParaRPr>
+          </a:p>
+        </p:txBody>
+      </p:sp>
+      <p:sp>
+        <p:nvSpPr>
+          <p:cNvPr id="181" name="Google Shape;181;p27"/>
+          <p:cNvSpPr/>
+          <p:nvPr/>
+        </p:nvSpPr>
+        <p:spPr>
+          <a:xfrm>
+            <a:off x="887852" y="3463125"/>
+            <a:ext cx="207900" cy="276900"/>
+          </a:xfrm>
+          <a:prstGeom prst="upArrow">
+            <a:avLst>
+              <a:gd fmla="val 50000" name="adj1"/>
+              <a:gd fmla="val 50000" name="adj2"/>
+            </a:avLst>
+          </a:prstGeom>
+          <a:solidFill>
+            <a:schemeClr val="lt2"/>
+          </a:solidFill>
+          <a:ln cap="flat" cmpd="sng" w="9525">
+            <a:solidFill>
+              <a:schemeClr val="dk2"/>
+            </a:solidFill>
+            <a:prstDash val="solid"/>
+            <a:round/>
+            <a:headEnd len="sm" w="sm" type="none"/>
+            <a:tailEnd len="sm" w="sm" type="none"/>
+          </a:ln>
+        </p:spPr>
+        <p:txBody>
+          <a:bodyPr anchorCtr="0" anchor="ctr" bIns="91425" lIns="91425" spcFirstLastPara="1" rIns="91425" wrap="square" tIns="91425">
+            <a:noAutofit/>
+          </a:bodyPr>
+          <a:lstStyle/>
+          <a:p>
+            <a:pPr indent="0" lvl="0" marL="0" rtl="0" algn="ctr">
+              <a:spcBef>
+                <a:spcPts val="0"/>
+              </a:spcBef>
+              <a:spcAft>
+                <a:spcPts val="0"/>
+              </a:spcAft>
+              <a:buNone/>
+            </a:pPr>
+            <a:r>
+              <a:t/>
+            </a:r>
+            <a:endParaRPr/>
+          </a:p>
+        </p:txBody>
+      </p:sp>
+      <p:sp>
+        <p:nvSpPr>
+          <p:cNvPr id="182" name="Google Shape;182;p27"/>
+          <p:cNvSpPr/>
+          <p:nvPr/>
+        </p:nvSpPr>
+        <p:spPr>
+          <a:xfrm>
+            <a:off x="887852" y="2461425"/>
+            <a:ext cx="207900" cy="276900"/>
+          </a:xfrm>
+          <a:prstGeom prst="upArrow">
+            <a:avLst>
+              <a:gd fmla="val 50000" name="adj1"/>
+              <a:gd fmla="val 50000" name="adj2"/>
+            </a:avLst>
+          </a:prstGeom>
+          <a:solidFill>
+            <a:schemeClr val="lt2"/>
+          </a:solidFill>
+          <a:ln cap="flat" cmpd="sng" w="9525">
+            <a:solidFill>
+              <a:schemeClr val="dk2"/>
+            </a:solidFill>
+            <a:prstDash val="solid"/>
+            <a:round/>
+            <a:headEnd len="sm" w="sm" type="none"/>
+            <a:tailEnd len="sm" w="sm" type="none"/>
+          </a:ln>
+        </p:spPr>
+        <p:txBody>
+          <a:bodyPr anchorCtr="0" anchor="ctr" bIns="91425" lIns="91425" spcFirstLastPara="1" rIns="91425" wrap="square" tIns="91425">
+            <a:noAutofit/>
+          </a:bodyPr>
+          <a:lstStyle/>
+          <a:p>
+            <a:pPr indent="0" lvl="0" marL="0" rtl="0" algn="ctr">
+              <a:spcBef>
+                <a:spcPts val="0"/>
+              </a:spcBef>
+              <a:spcAft>
+                <a:spcPts val="0"/>
+              </a:spcAft>
+              <a:buNone/>
+            </a:pPr>
+            <a:r>
+              <a:t/>
+            </a:r>
+            <a:endParaRPr/>
+          </a:p>
+        </p:txBody>
+      </p:sp>
+      <p:sp>
+        <p:nvSpPr>
+          <p:cNvPr id="183" name="Google Shape;183;p27"/>
+          <p:cNvSpPr txBox="1"/>
+          <p:nvPr/>
+        </p:nvSpPr>
+        <p:spPr>
+          <a:xfrm>
+            <a:off x="2015098" y="1305700"/>
+            <a:ext cx="2178600" cy="431100"/>
+          </a:xfrm>
+          <a:prstGeom prst="rect">
+            <a:avLst/>
+          </a:prstGeom>
+          <a:noFill/>
+          <a:ln>
+            <a:noFill/>
+          </a:ln>
+        </p:spPr>
+        <p:txBody>
+          <a:bodyPr anchorCtr="0" anchor="t" bIns="91425" lIns="91425" spcFirstLastPara="1" rIns="91425" wrap="square" tIns="91425">
+            <a:spAutoFit/>
+          </a:bodyPr>
+          <a:lstStyle/>
+          <a:p>
+            <a:pPr indent="0" lvl="0" marL="0" rtl="0" algn="l">
+              <a:spcBef>
+                <a:spcPts val="0"/>
+              </a:spcBef>
+              <a:spcAft>
+                <a:spcPts val="0"/>
+              </a:spcAft>
+              <a:buNone/>
+            </a:pPr>
+            <a:r>
+              <a:rPr lang="en" sz="1600">
+                <a:solidFill>
+                  <a:schemeClr val="dk2"/>
+                </a:solidFill>
+              </a:rPr>
+              <a:t>Target</a:t>
+            </a:r>
+            <a:r>
+              <a:rPr lang="en" sz="1600">
+                <a:solidFill>
+                  <a:schemeClr val="dk2"/>
+                </a:solidFill>
+              </a:rPr>
+              <a:t> tokens</a:t>
+            </a:r>
+            <a:endParaRPr sz="1600">
+              <a:solidFill>
+                <a:schemeClr val="dk2"/>
+              </a:solidFill>
+            </a:endParaRPr>
+          </a:p>
+        </p:txBody>
+      </p:sp>
+      <p:sp>
+        <p:nvSpPr>
+          <p:cNvPr id="184" name="Google Shape;184;p27"/>
+          <p:cNvSpPr txBox="1"/>
+          <p:nvPr/>
+        </p:nvSpPr>
+        <p:spPr>
+          <a:xfrm>
+            <a:off x="4588875" y="3609800"/>
+            <a:ext cx="3492600" cy="415500"/>
+          </a:xfrm>
+          <a:prstGeom prst="rect">
+            <a:avLst/>
+          </a:prstGeom>
+          <a:noFill/>
+          <a:ln>
+            <a:noFill/>
+          </a:ln>
+        </p:spPr>
+        <p:txBody>
+          <a:bodyPr anchorCtr="0" anchor="t" bIns="91425" lIns="91425" spcFirstLastPara="1" rIns="91425" wrap="square" tIns="91425">
+            <a:spAutoFit/>
+          </a:bodyPr>
+          <a:lstStyle/>
+          <a:p>
+            <a:pPr indent="0" lvl="0" marL="0" rtl="0" algn="l">
+              <a:spcBef>
+                <a:spcPts val="0"/>
+              </a:spcBef>
+              <a:spcAft>
+                <a:spcPts val="0"/>
+              </a:spcAft>
+              <a:buNone/>
+            </a:pPr>
+            <a:r>
+              <a:rPr lang="en" sz="1500">
+                <a:solidFill>
+                  <a:schemeClr val="dk2"/>
+                </a:solidFill>
+              </a:rPr>
+              <a:t>&lt;BOS&gt;, Hello, how, are, you, &lt;EOS&gt;</a:t>
+            </a:r>
+            <a:endParaRPr sz="1500">
+              <a:solidFill>
+                <a:schemeClr val="dk2"/>
+              </a:solidFill>
+            </a:endParaRPr>
+          </a:p>
+        </p:txBody>
+      </p:sp>
+      <p:sp>
+        <p:nvSpPr>
+          <p:cNvPr id="185" name="Google Shape;185;p27"/>
+          <p:cNvSpPr txBox="1"/>
+          <p:nvPr/>
+        </p:nvSpPr>
+        <p:spPr>
+          <a:xfrm>
+            <a:off x="5081550" y="4336200"/>
+            <a:ext cx="3000000" cy="446400"/>
+          </a:xfrm>
+          <a:prstGeom prst="rect">
+            <a:avLst/>
+          </a:prstGeom>
+          <a:noFill/>
+          <a:ln>
+            <a:noFill/>
+          </a:ln>
+        </p:spPr>
+        <p:txBody>
+          <a:bodyPr anchorCtr="0" anchor="t" bIns="91425" lIns="91425" spcFirstLastPara="1" rIns="91425" wrap="square" tIns="91425">
+            <a:spAutoFit/>
+          </a:bodyPr>
+          <a:lstStyle/>
+          <a:p>
+            <a:pPr indent="0" lvl="0" marL="0" rtl="0" algn="l">
+              <a:spcBef>
+                <a:spcPts val="0"/>
+              </a:spcBef>
+              <a:spcAft>
+                <a:spcPts val="0"/>
+              </a:spcAft>
+              <a:buNone/>
+            </a:pPr>
+            <a:r>
+              <a:rPr lang="en" sz="1700">
+                <a:solidFill>
+                  <a:schemeClr val="dk2"/>
+                </a:solidFill>
+              </a:rPr>
+              <a:t>Hello, how, are, you</a:t>
+            </a:r>
+            <a:endParaRPr sz="1300"/>
+          </a:p>
+        </p:txBody>
+      </p:sp>
+      <p:sp>
+        <p:nvSpPr>
+          <p:cNvPr id="186" name="Google Shape;186;p27"/>
+          <p:cNvSpPr/>
+          <p:nvPr/>
+        </p:nvSpPr>
+        <p:spPr>
+          <a:xfrm>
+            <a:off x="6118800" y="4025300"/>
+            <a:ext cx="363000" cy="354300"/>
+          </a:xfrm>
+          <a:prstGeom prst="upArrow">
+            <a:avLst>
+              <a:gd fmla="val 50000" name="adj1"/>
+              <a:gd fmla="val 50000" name="adj2"/>
+            </a:avLst>
+          </a:prstGeom>
+          <a:solidFill>
+            <a:schemeClr val="lt2"/>
+          </a:solidFill>
+          <a:ln cap="flat" cmpd="sng" w="9525">
+            <a:solidFill>
+              <a:schemeClr val="dk2"/>
+            </a:solidFill>
+            <a:prstDash val="solid"/>
+            <a:round/>
+            <a:headEnd len="sm" w="sm" type="none"/>
+            <a:tailEnd len="sm" w="sm" type="none"/>
+          </a:ln>
+        </p:spPr>
+        <p:txBody>
+          <a:bodyPr anchorCtr="0" anchor="ctr" bIns="91425" lIns="91425" spcFirstLastPara="1" rIns="91425" wrap="square" tIns="91425">
+            <a:noAutofit/>
+          </a:bodyPr>
+          <a:lstStyle/>
+          <a:p>
+            <a:pPr indent="0" lvl="0" marL="0" rtl="0" algn="ctr">
+              <a:spcBef>
+                <a:spcPts val="0"/>
+              </a:spcBef>
+              <a:spcAft>
+                <a:spcPts val="0"/>
+              </a:spcAft>
+              <a:buNone/>
+            </a:pPr>
+            <a:r>
+              <a:t/>
+            </a:r>
+            <a:endParaRPr/>
+          </a:p>
+        </p:txBody>
+      </p:sp>
+      <p:sp>
+        <p:nvSpPr>
+          <p:cNvPr id="187" name="Google Shape;187;p27"/>
+          <p:cNvSpPr txBox="1"/>
+          <p:nvPr/>
+        </p:nvSpPr>
+        <p:spPr>
+          <a:xfrm>
+            <a:off x="3455250" y="2844922"/>
+            <a:ext cx="2440800" cy="384900"/>
+          </a:xfrm>
+          <a:prstGeom prst="rect">
+            <a:avLst/>
+          </a:prstGeom>
+          <a:noFill/>
+          <a:ln>
+            <a:noFill/>
+          </a:ln>
+        </p:spPr>
+        <p:txBody>
+          <a:bodyPr anchorCtr="0" anchor="t" bIns="91425" lIns="91425" spcFirstLastPara="1" rIns="91425" wrap="square" tIns="91425">
+            <a:spAutoFit/>
+          </a:bodyPr>
+          <a:lstStyle/>
+          <a:p>
+            <a:pPr indent="0" lvl="0" marL="0" rtl="0" algn="l">
+              <a:spcBef>
+                <a:spcPts val="0"/>
+              </a:spcBef>
+              <a:spcAft>
+                <a:spcPts val="0"/>
+              </a:spcAft>
+              <a:buNone/>
+            </a:pPr>
+            <a:r>
+              <a:rPr lang="en" sz="1300">
+                <a:solidFill>
+                  <a:schemeClr val="accent1"/>
+                </a:solidFill>
+              </a:rPr>
+              <a:t>&lt;BOS&gt;, Hello, how, are, you</a:t>
+            </a:r>
+            <a:endParaRPr sz="1300">
+              <a:solidFill>
+                <a:schemeClr val="accent1"/>
+              </a:solidFill>
+            </a:endParaRPr>
+          </a:p>
+        </p:txBody>
+      </p:sp>
+      <p:sp>
+        <p:nvSpPr>
+          <p:cNvPr id="188" name="Google Shape;188;p27"/>
+          <p:cNvSpPr txBox="1"/>
+          <p:nvPr/>
+        </p:nvSpPr>
+        <p:spPr>
+          <a:xfrm>
+            <a:off x="6470900" y="2843800"/>
+            <a:ext cx="2467200" cy="384900"/>
+          </a:xfrm>
+          <a:prstGeom prst="rect">
+            <a:avLst/>
+          </a:prstGeom>
+          <a:noFill/>
+          <a:ln>
+            <a:noFill/>
+          </a:ln>
+        </p:spPr>
+        <p:txBody>
+          <a:bodyPr anchorCtr="0" anchor="t" bIns="91425" lIns="91425" spcFirstLastPara="1" rIns="91425" wrap="square" tIns="91425">
+            <a:spAutoFit/>
+          </a:bodyPr>
+          <a:lstStyle/>
+          <a:p>
+            <a:pPr indent="0" lvl="0" marL="0" rtl="0" algn="l">
+              <a:spcBef>
+                <a:spcPts val="0"/>
+              </a:spcBef>
+              <a:spcAft>
+                <a:spcPts val="0"/>
+              </a:spcAft>
+              <a:buNone/>
+            </a:pPr>
+            <a:r>
+              <a:rPr lang="en" sz="1300">
+                <a:solidFill>
+                  <a:srgbClr val="FF0000"/>
+                </a:solidFill>
+              </a:rPr>
+              <a:t>Hello, how, are, you, </a:t>
+            </a:r>
+            <a:r>
+              <a:rPr lang="en" sz="1300">
+                <a:solidFill>
+                  <a:srgbClr val="FF0000"/>
+                </a:solidFill>
+              </a:rPr>
+              <a:t>&lt;EOS&gt;</a:t>
+            </a:r>
+            <a:endParaRPr sz="1300">
+              <a:solidFill>
+                <a:srgbClr val="FF0000"/>
+              </a:solidFill>
+            </a:endParaRPr>
+          </a:p>
+        </p:txBody>
+      </p:sp>
+      <p:cxnSp>
+        <p:nvCxnSpPr>
+          <p:cNvPr id="189" name="Google Shape;189;p27"/>
+          <p:cNvCxnSpPr>
+            <a:stCxn id="184" idx="0"/>
+            <a:endCxn id="187" idx="2"/>
+          </p:cNvCxnSpPr>
+          <p:nvPr/>
+        </p:nvCxnSpPr>
+        <p:spPr>
+          <a:xfrm flipH="1" rot="5400000">
+            <a:off x="5315325" y="2589950"/>
+            <a:ext cx="380100" cy="1659600"/>
+          </a:xfrm>
+          <a:prstGeom prst="bentConnector3">
+            <a:avLst>
+              <a:gd fmla="val 49984" name="adj1"/>
+            </a:avLst>
+          </a:prstGeom>
+          <a:noFill/>
+          <a:ln cap="flat" cmpd="sng" w="9525">
+            <a:solidFill>
+              <a:schemeClr val="dk2"/>
+            </a:solidFill>
+            <a:prstDash val="solid"/>
+            <a:round/>
+            <a:headEnd len="med" w="med" type="none"/>
+            <a:tailEnd len="med" w="med" type="stealth"/>
+          </a:ln>
+        </p:spPr>
+      </p:cxnSp>
+      <p:cxnSp>
+        <p:nvCxnSpPr>
+          <p:cNvPr id="190" name="Google Shape;190;p27"/>
+          <p:cNvCxnSpPr>
+            <a:stCxn id="184" idx="0"/>
+            <a:endCxn id="188" idx="2"/>
+          </p:cNvCxnSpPr>
+          <p:nvPr/>
+        </p:nvCxnSpPr>
+        <p:spPr>
+          <a:xfrm rot="-5400000">
+            <a:off x="6829275" y="2734700"/>
+            <a:ext cx="381000" cy="1369200"/>
+          </a:xfrm>
+          <a:prstGeom prst="bentConnector3">
+            <a:avLst>
+              <a:gd fmla="val 50013" name="adj1"/>
+            </a:avLst>
+          </a:prstGeom>
+          <a:noFill/>
+          <a:ln cap="flat" cmpd="sng" w="9525">
+            <a:solidFill>
+              <a:schemeClr val="dk2"/>
+            </a:solidFill>
+            <a:prstDash val="solid"/>
+            <a:round/>
+            <a:headEnd len="med" w="med" type="none"/>
+            <a:tailEnd len="med" w="med" type="stealth"/>
+          </a:ln>
+        </p:spPr>
+      </p:cxnSp>
+      <p:sp>
+        <p:nvSpPr>
+          <p:cNvPr id="191" name="Google Shape;191;p27"/>
+          <p:cNvSpPr/>
+          <p:nvPr/>
+        </p:nvSpPr>
+        <p:spPr>
+          <a:xfrm>
+            <a:off x="4588875" y="3662750"/>
+            <a:ext cx="2560800" cy="309600"/>
+          </a:xfrm>
+          <a:prstGeom prst="rect">
+            <a:avLst/>
+          </a:prstGeom>
+          <a:noFill/>
+          <a:ln cap="flat" cmpd="sng" w="9525">
+            <a:solidFill>
+              <a:schemeClr val="accent1"/>
+            </a:solidFill>
+            <a:prstDash val="solid"/>
+            <a:round/>
+            <a:headEnd len="sm" w="sm" type="none"/>
+            <a:tailEnd len="sm" w="sm" type="none"/>
+          </a:ln>
+        </p:spPr>
+        <p:txBody>
+          <a:bodyPr anchorCtr="0" anchor="ctr" bIns="91425" lIns="91425" spcFirstLastPara="1" rIns="91425" wrap="square" tIns="91425">
+            <a:noAutofit/>
+          </a:bodyPr>
+          <a:lstStyle/>
+          <a:p>
+            <a:pPr indent="0" lvl="0" marL="0" rtl="0" algn="ctr">
+              <a:spcBef>
+                <a:spcPts val="0"/>
+              </a:spcBef>
+              <a:spcAft>
+                <a:spcPts val="0"/>
+              </a:spcAft>
+              <a:buNone/>
+            </a:pPr>
+            <a:r>
+              <a:t/>
+            </a:r>
+            <a:endParaRPr/>
+          </a:p>
+        </p:txBody>
+      </p:sp>
+      <p:sp>
+        <p:nvSpPr>
+          <p:cNvPr id="192" name="Google Shape;192;p27"/>
+          <p:cNvSpPr/>
+          <p:nvPr/>
+        </p:nvSpPr>
+        <p:spPr>
+          <a:xfrm>
+            <a:off x="5360400" y="3662750"/>
+            <a:ext cx="2560800" cy="309600"/>
+          </a:xfrm>
+          <a:prstGeom prst="rect">
+            <a:avLst/>
+          </a:prstGeom>
+          <a:noFill/>
+          <a:ln cap="flat" cmpd="sng" w="9525">
+            <a:solidFill>
+              <a:srgbClr val="FF0000"/>
+            </a:solidFill>
+            <a:prstDash val="solid"/>
+            <a:round/>
+            <a:headEnd len="sm" w="sm" type="none"/>
+            <a:tailEnd len="sm" w="sm" type="none"/>
+          </a:ln>
+        </p:spPr>
+        <p:txBody>
+          <a:bodyPr anchorCtr="0" anchor="ctr" bIns="91425" lIns="91425" spcFirstLastPara="1" rIns="91425" wrap="square" tIns="91425">
+            <a:noAutofit/>
+          </a:bodyPr>
+          <a:lstStyle/>
+          <a:p>
+            <a:pPr indent="0" lvl="0" marL="0" rtl="0" algn="ctr">
+              <a:spcBef>
+                <a:spcPts val="0"/>
+              </a:spcBef>
+              <a:spcAft>
+                <a:spcPts val="0"/>
+              </a:spcAft>
+              <a:buNone/>
+            </a:pPr>
+            <a:r>
+              <a:t/>
+            </a:r>
+            <a:endParaRPr/>
+          </a:p>
+        </p:txBody>
+      </p:sp>
+      <p:sp>
+        <p:nvSpPr>
+          <p:cNvPr id="193" name="Google Shape;193;p27"/>
+          <p:cNvSpPr txBox="1"/>
+          <p:nvPr/>
+        </p:nvSpPr>
+        <p:spPr>
+          <a:xfrm>
+            <a:off x="4297199" y="2393050"/>
+            <a:ext cx="756900" cy="461700"/>
+          </a:xfrm>
+          <a:prstGeom prst="rect">
+            <a:avLst/>
+          </a:prstGeom>
+          <a:noFill/>
+          <a:ln>
+            <a:noFill/>
+          </a:ln>
+        </p:spPr>
+        <p:txBody>
+          <a:bodyPr anchorCtr="0" anchor="t" bIns="91425" lIns="91425" spcFirstLastPara="1" rIns="91425" wrap="square" tIns="91425">
+            <a:spAutoFit/>
+          </a:bodyPr>
+          <a:lstStyle/>
+          <a:p>
+            <a:pPr indent="0" lvl="0" marL="0" rtl="0" algn="l">
+              <a:spcBef>
+                <a:spcPts val="0"/>
+              </a:spcBef>
+              <a:spcAft>
+                <a:spcPts val="0"/>
+              </a:spcAft>
+              <a:buNone/>
+            </a:pPr>
+            <a:r>
+              <a:rPr lang="en" sz="1800">
+                <a:solidFill>
+                  <a:schemeClr val="dk2"/>
+                </a:solidFill>
+              </a:rPr>
+              <a:t>Input</a:t>
+            </a:r>
+            <a:endParaRPr sz="1800">
+              <a:solidFill>
+                <a:schemeClr val="dk2"/>
+              </a:solidFill>
+            </a:endParaRPr>
+          </a:p>
+        </p:txBody>
+      </p:sp>
+      <p:sp>
+        <p:nvSpPr>
+          <p:cNvPr id="194" name="Google Shape;194;p27"/>
+          <p:cNvSpPr txBox="1"/>
+          <p:nvPr/>
+        </p:nvSpPr>
+        <p:spPr>
+          <a:xfrm>
+            <a:off x="6959250" y="2393050"/>
+            <a:ext cx="888000" cy="461700"/>
+          </a:xfrm>
+          <a:prstGeom prst="rect">
+            <a:avLst/>
+          </a:prstGeom>
+          <a:noFill/>
+          <a:ln>
+            <a:noFill/>
+          </a:ln>
+        </p:spPr>
+        <p:txBody>
+          <a:bodyPr anchorCtr="0" anchor="t" bIns="91425" lIns="91425" spcFirstLastPara="1" rIns="91425" wrap="square" tIns="91425">
+            <a:spAutoFit/>
+          </a:bodyPr>
+          <a:lstStyle/>
+          <a:p>
+            <a:pPr indent="0" lvl="0" marL="0" rtl="0" algn="l">
+              <a:spcBef>
+                <a:spcPts val="0"/>
+              </a:spcBef>
+              <a:spcAft>
+                <a:spcPts val="0"/>
+              </a:spcAft>
+              <a:buNone/>
+            </a:pPr>
+            <a:r>
+              <a:rPr lang="en" sz="1800">
+                <a:solidFill>
+                  <a:schemeClr val="dk2"/>
+                </a:solidFill>
+              </a:rPr>
+              <a:t>Target</a:t>
+            </a:r>
+            <a:endParaRPr sz="1800">
+              <a:solidFill>
+                <a:schemeClr val="dk2"/>
+              </a:solidFill>
+            </a:endParaRPr>
+          </a:p>
+        </p:txBody>
+      </p:sp>
+      <p:sp>
+        <p:nvSpPr>
+          <p:cNvPr id="195" name="Google Shape;195;p27"/>
+          <p:cNvSpPr txBox="1"/>
+          <p:nvPr/>
+        </p:nvSpPr>
+        <p:spPr>
+          <a:xfrm>
+            <a:off x="4519412" y="1765313"/>
+            <a:ext cx="2440800" cy="384900"/>
+          </a:xfrm>
+          <a:prstGeom prst="rect">
+            <a:avLst/>
+          </a:prstGeom>
+          <a:noFill/>
+          <a:ln>
+            <a:noFill/>
+          </a:ln>
+        </p:spPr>
+        <p:txBody>
+          <a:bodyPr anchorCtr="0" anchor="t" bIns="91425" lIns="91425" spcFirstLastPara="1" rIns="91425" wrap="square" tIns="91425">
+            <a:spAutoFit/>
+          </a:bodyPr>
+          <a:lstStyle/>
+          <a:p>
+            <a:pPr indent="0" lvl="0" marL="0" rtl="0" algn="l">
+              <a:spcBef>
+                <a:spcPts val="0"/>
+              </a:spcBef>
+              <a:spcAft>
+                <a:spcPts val="0"/>
+              </a:spcAft>
+              <a:buNone/>
+            </a:pPr>
+            <a:r>
+              <a:rPr lang="en" sz="1300">
+                <a:solidFill>
+                  <a:schemeClr val="accent1"/>
+                </a:solidFill>
+              </a:rPr>
+              <a:t>&lt;BOS&gt;, Hello, how, are, you</a:t>
+            </a:r>
+            <a:endParaRPr sz="1300">
+              <a:solidFill>
+                <a:schemeClr val="accent1"/>
+              </a:solidFill>
+            </a:endParaRPr>
+          </a:p>
+        </p:txBody>
+      </p:sp>
+      <p:sp>
+        <p:nvSpPr>
+          <p:cNvPr id="196" name="Google Shape;196;p27"/>
+          <p:cNvSpPr txBox="1"/>
+          <p:nvPr/>
+        </p:nvSpPr>
+        <p:spPr>
+          <a:xfrm>
+            <a:off x="4751937" y="1283088"/>
+            <a:ext cx="2467200" cy="384900"/>
+          </a:xfrm>
+          <a:prstGeom prst="rect">
+            <a:avLst/>
+          </a:prstGeom>
+          <a:noFill/>
+          <a:ln>
+            <a:noFill/>
+          </a:ln>
+        </p:spPr>
+        <p:txBody>
+          <a:bodyPr anchorCtr="0" anchor="t" bIns="91425" lIns="91425" spcFirstLastPara="1" rIns="91425" wrap="square" tIns="91425">
+            <a:spAutoFit/>
+          </a:bodyPr>
+          <a:lstStyle/>
+          <a:p>
+            <a:pPr indent="0" lvl="0" marL="0" rtl="0" algn="l">
+              <a:spcBef>
+                <a:spcPts val="0"/>
+              </a:spcBef>
+              <a:spcAft>
+                <a:spcPts val="0"/>
+              </a:spcAft>
+              <a:buNone/>
+            </a:pPr>
+            <a:r>
+              <a:rPr lang="en" sz="1300">
+                <a:solidFill>
+                  <a:srgbClr val="FF0000"/>
+                </a:solidFill>
+              </a:rPr>
+              <a:t>Hello, how, are, you, &lt;EOS&gt;</a:t>
+            </a:r>
+            <a:endParaRPr sz="1300">
+              <a:solidFill>
+                <a:srgbClr val="FF0000"/>
+              </a:solidFill>
+            </a:endParaRPr>
+          </a:p>
+        </p:txBody>
+      </p:sp>
+      <p:cxnSp>
+        <p:nvCxnSpPr>
+          <p:cNvPr id="197" name="Google Shape;197;p27"/>
+          <p:cNvCxnSpPr/>
+          <p:nvPr/>
+        </p:nvCxnSpPr>
+        <p:spPr>
+          <a:xfrm rot="10800000">
+            <a:off x="5004513" y="1595563"/>
+            <a:ext cx="0" cy="202500"/>
+          </a:xfrm>
+          <a:prstGeom prst="straightConnector1">
+            <a:avLst/>
+          </a:prstGeom>
+          <a:noFill/>
+          <a:ln cap="flat" cmpd="sng" w="9525">
+            <a:solidFill>
+              <a:schemeClr val="dk2"/>
+            </a:solidFill>
+            <a:prstDash val="solid"/>
+            <a:round/>
+            <a:headEnd len="med" w="med" type="none"/>
+            <a:tailEnd len="med" w="med" type="triangle"/>
+          </a:ln>
+        </p:spPr>
+      </p:cxnSp>
+      <p:cxnSp>
+        <p:nvCxnSpPr>
+          <p:cNvPr id="198" name="Google Shape;198;p27"/>
+          <p:cNvCxnSpPr/>
+          <p:nvPr/>
+        </p:nvCxnSpPr>
+        <p:spPr>
+          <a:xfrm rot="10800000">
+            <a:off x="5487763" y="1595563"/>
+            <a:ext cx="0" cy="202500"/>
+          </a:xfrm>
+          <a:prstGeom prst="straightConnector1">
+            <a:avLst/>
+          </a:prstGeom>
+          <a:noFill/>
+          <a:ln cap="flat" cmpd="sng" w="9525">
+            <a:solidFill>
+              <a:schemeClr val="dk2"/>
+            </a:solidFill>
+            <a:prstDash val="solid"/>
+            <a:round/>
+            <a:headEnd len="med" w="med" type="none"/>
+            <a:tailEnd len="med" w="med" type="triangle"/>
+          </a:ln>
+        </p:spPr>
+      </p:cxnSp>
+      <p:cxnSp>
+        <p:nvCxnSpPr>
+          <p:cNvPr id="199" name="Google Shape;199;p27"/>
+          <p:cNvCxnSpPr/>
+          <p:nvPr/>
+        </p:nvCxnSpPr>
+        <p:spPr>
+          <a:xfrm rot="10800000">
+            <a:off x="5815338" y="1595563"/>
+            <a:ext cx="0" cy="202500"/>
+          </a:xfrm>
+          <a:prstGeom prst="straightConnector1">
+            <a:avLst/>
+          </a:prstGeom>
+          <a:noFill/>
+          <a:ln cap="flat" cmpd="sng" w="9525">
+            <a:solidFill>
+              <a:schemeClr val="dk2"/>
+            </a:solidFill>
+            <a:prstDash val="solid"/>
+            <a:round/>
+            <a:headEnd len="med" w="med" type="none"/>
+            <a:tailEnd len="med" w="med" type="triangle"/>
+          </a:ln>
+        </p:spPr>
+      </p:cxnSp>
+      <p:cxnSp>
+        <p:nvCxnSpPr>
+          <p:cNvPr id="200" name="Google Shape;200;p27"/>
+          <p:cNvCxnSpPr/>
+          <p:nvPr/>
+        </p:nvCxnSpPr>
+        <p:spPr>
+          <a:xfrm rot="10800000">
+            <a:off x="6118788" y="1595563"/>
+            <a:ext cx="0" cy="202500"/>
+          </a:xfrm>
+          <a:prstGeom prst="straightConnector1">
+            <a:avLst/>
+          </a:prstGeom>
+          <a:noFill/>
+          <a:ln cap="flat" cmpd="sng" w="9525">
+            <a:solidFill>
+              <a:schemeClr val="dk2"/>
+            </a:solidFill>
+            <a:prstDash val="solid"/>
+            <a:round/>
+            <a:headEnd len="med" w="med" type="none"/>
+            <a:tailEnd len="med" w="med" type="triangle"/>
+          </a:ln>
+        </p:spPr>
+      </p:cxnSp>
+      <p:cxnSp>
+        <p:nvCxnSpPr>
+          <p:cNvPr id="201" name="Google Shape;201;p27"/>
+          <p:cNvCxnSpPr/>
+          <p:nvPr/>
+        </p:nvCxnSpPr>
+        <p:spPr>
+          <a:xfrm rot="10800000">
+            <a:off x="6502263" y="1595563"/>
+            <a:ext cx="0" cy="202500"/>
+          </a:xfrm>
+          <a:prstGeom prst="straightConnector1">
+            <a:avLst/>
+          </a:prstGeom>
+          <a:noFill/>
+          <a:ln cap="flat" cmpd="sng" w="9525">
+            <a:solidFill>
+              <a:schemeClr val="dk2"/>
+            </a:solidFill>
+            <a:prstDash val="solid"/>
+            <a:round/>
+            <a:headEnd len="med" w="med" type="none"/>
+            <a:tailEnd len="med" w="med" type="triangle"/>
+          </a:ln>
+        </p:spPr>
+      </p:cxnSp>
+      <p:sp>
+        <p:nvSpPr>
+          <p:cNvPr id="202" name="Google Shape;202;p27"/>
+          <p:cNvSpPr txBox="1"/>
+          <p:nvPr/>
+        </p:nvSpPr>
+        <p:spPr>
+          <a:xfrm>
+            <a:off x="1715350" y="2783425"/>
+            <a:ext cx="1815000" cy="585000"/>
+          </a:xfrm>
+          <a:prstGeom prst="rect">
+            <a:avLst/>
+          </a:prstGeom>
+          <a:noFill/>
+          <a:ln>
+            <a:noFill/>
+          </a:ln>
+        </p:spPr>
+        <p:txBody>
+          <a:bodyPr anchorCtr="0" anchor="t" bIns="91425" lIns="91425" spcFirstLastPara="1" rIns="91425" wrap="square" tIns="91425">
+            <a:spAutoFit/>
+          </a:bodyPr>
+          <a:lstStyle/>
+          <a:p>
+            <a:pPr indent="0" lvl="0" marL="0" rtl="0" algn="ctr">
+              <a:spcBef>
+                <a:spcPts val="0"/>
+              </a:spcBef>
+              <a:spcAft>
+                <a:spcPts val="0"/>
+              </a:spcAft>
+              <a:buNone/>
+            </a:pPr>
+            <a:r>
+              <a:rPr lang="en" sz="1300">
+                <a:solidFill>
+                  <a:schemeClr val="dk2"/>
+                </a:solidFill>
+              </a:rPr>
+              <a:t>Causal Attention Mask</a:t>
+            </a:r>
+            <a:endParaRPr sz="1300">
+              <a:solidFill>
+                <a:schemeClr val="dk2"/>
+              </a:solidFill>
+            </a:endParaRPr>
+          </a:p>
+        </p:txBody>
+      </p:sp>
+      <p:cxnSp>
+        <p:nvCxnSpPr>
+          <p:cNvPr id="203" name="Google Shape;203;p27"/>
+          <p:cNvCxnSpPr/>
+          <p:nvPr/>
+        </p:nvCxnSpPr>
+        <p:spPr>
+          <a:xfrm rot="10800000">
+            <a:off x="1715625" y="3075975"/>
+            <a:ext cx="314400" cy="1800"/>
+          </a:xfrm>
+          <a:prstGeom prst="straightConnector1">
+            <a:avLst/>
+          </a:prstGeom>
+          <a:noFill/>
+          <a:ln cap="flat" cmpd="sng" w="9525">
+            <a:solidFill>
+              <a:schemeClr val="dk2"/>
+            </a:solidFill>
+            <a:prstDash val="solid"/>
+            <a:round/>
+            <a:headEnd len="med" w="med" type="none"/>
+            <a:tailEnd len="med" w="med" type="triangle"/>
+          </a:ln>
+        </p:spPr>
+      </p:cxnSp>
+      <p:sp>
+        <p:nvSpPr>
+          <p:cNvPr id="204" name="Google Shape;204;p27"/>
+          <p:cNvSpPr txBox="1"/>
+          <p:nvPr/>
+        </p:nvSpPr>
+        <p:spPr>
+          <a:xfrm>
+            <a:off x="7149675" y="1383200"/>
+            <a:ext cx="1743000" cy="738900"/>
+          </a:xfrm>
+          <a:prstGeom prst="rect">
+            <a:avLst/>
+          </a:prstGeom>
+          <a:noFill/>
+          <a:ln>
+            <a:noFill/>
+          </a:ln>
+        </p:spPr>
+        <p:txBody>
+          <a:bodyPr anchorCtr="0" anchor="t" bIns="91425" lIns="91425" spcFirstLastPara="1" rIns="91425" wrap="square" tIns="91425">
+            <a:spAutoFit/>
+          </a:bodyPr>
+          <a:lstStyle/>
+          <a:p>
+            <a:pPr indent="0" lvl="0" marL="0" rtl="0" algn="l">
+              <a:spcBef>
+                <a:spcPts val="0"/>
+              </a:spcBef>
+              <a:spcAft>
+                <a:spcPts val="0"/>
+              </a:spcAft>
+              <a:buNone/>
+            </a:pPr>
+            <a:r>
+              <a:rPr lang="en" sz="1200">
+                <a:solidFill>
+                  <a:schemeClr val="dk2"/>
+                </a:solidFill>
+              </a:rPr>
+              <a:t>Predicting end of a sentence is very important!</a:t>
+            </a:r>
+            <a:endParaRPr sz="1200">
+              <a:solidFill>
+                <a:schemeClr val="dk2"/>
+              </a:solidFill>
+            </a:endParaRPr>
+          </a:p>
+        </p:txBody>
+      </p:sp>
+      <p:sp>
+        <p:nvSpPr>
+          <p:cNvPr id="205" name="Google Shape;205;p27"/>
+          <p:cNvSpPr txBox="1"/>
+          <p:nvPr/>
+        </p:nvSpPr>
+        <p:spPr>
+          <a:xfrm>
+            <a:off x="370750" y="4337950"/>
+            <a:ext cx="3994800" cy="646500"/>
+          </a:xfrm>
+          <a:prstGeom prst="rect">
+            <a:avLst/>
+          </a:prstGeom>
+          <a:noFill/>
+          <a:ln>
+            <a:noFill/>
+          </a:ln>
+        </p:spPr>
+        <p:txBody>
+          <a:bodyPr anchorCtr="0" anchor="t" bIns="91425" lIns="91425" spcFirstLastPara="1" rIns="91425" wrap="square" tIns="91425">
+            <a:spAutoFit/>
+          </a:bodyPr>
+          <a:lstStyle/>
+          <a:p>
+            <a:pPr indent="0" lvl="0" marL="0" rtl="0" algn="l">
+              <a:spcBef>
+                <a:spcPts val="0"/>
+              </a:spcBef>
+              <a:spcAft>
+                <a:spcPts val="0"/>
+              </a:spcAft>
+              <a:buNone/>
+            </a:pPr>
+            <a:r>
+              <a:rPr lang="en" sz="1500">
+                <a:solidFill>
+                  <a:schemeClr val="dk2"/>
+                </a:solidFill>
+              </a:rPr>
+              <a:t>Tokenization, embedding lookup, positional embeddings remain unchanged</a:t>
+            </a:r>
+            <a:endParaRPr sz="1100"/>
+          </a:p>
+        </p:txBody>
+      </p:sp>
+      <p:sp>
+        <p:nvSpPr>
+          <p:cNvPr id="206" name="Google Shape;206;p27"/>
+          <p:cNvSpPr/>
+          <p:nvPr/>
+        </p:nvSpPr>
+        <p:spPr>
+          <a:xfrm>
+            <a:off x="299250" y="1283100"/>
+            <a:ext cx="1385100" cy="528000"/>
+          </a:xfrm>
+          <a:prstGeom prst="roundRect">
+            <a:avLst>
+              <a:gd fmla="val 16667" name="adj"/>
+            </a:avLst>
+          </a:prstGeom>
+          <a:solidFill>
+            <a:schemeClr val="lt2"/>
+          </a:solidFill>
+          <a:ln cap="flat" cmpd="sng" w="9525">
+            <a:solidFill>
+              <a:schemeClr val="dk2"/>
+            </a:solidFill>
+            <a:prstDash val="solid"/>
+            <a:round/>
+            <a:headEnd len="sm" w="sm" type="none"/>
+            <a:tailEnd len="sm" w="sm" type="none"/>
+          </a:ln>
+        </p:spPr>
+        <p:txBody>
+          <a:bodyPr anchorCtr="0" anchor="ctr" bIns="91425" lIns="91425" spcFirstLastPara="1" rIns="91425" wrap="square" tIns="91425">
+            <a:noAutofit/>
+          </a:bodyPr>
+          <a:lstStyle/>
+          <a:p>
+            <a:pPr indent="0" lvl="0" marL="0" rtl="0" algn="ctr">
+              <a:spcBef>
+                <a:spcPts val="0"/>
+              </a:spcBef>
+              <a:spcAft>
+                <a:spcPts val="0"/>
+              </a:spcAft>
+              <a:buNone/>
+            </a:pPr>
+            <a:r>
+              <a:rPr lang="en"/>
+              <a:t>X-entropy loss</a:t>
+            </a:r>
+            <a:endParaRPr/>
+          </a:p>
+        </p:txBody>
+      </p:sp>
+      <p:sp>
+        <p:nvSpPr>
+          <p:cNvPr id="207" name="Google Shape;207;p27"/>
+          <p:cNvSpPr txBox="1"/>
+          <p:nvPr/>
+        </p:nvSpPr>
+        <p:spPr>
+          <a:xfrm>
+            <a:off x="299249" y="2059163"/>
+            <a:ext cx="1426800" cy="431100"/>
+          </a:xfrm>
+          <a:prstGeom prst="rect">
+            <a:avLst/>
+          </a:prstGeom>
+          <a:noFill/>
+          <a:ln>
+            <a:noFill/>
+          </a:ln>
+        </p:spPr>
+        <p:txBody>
+          <a:bodyPr anchorCtr="0" anchor="t" bIns="91425" lIns="91425" spcFirstLastPara="1" rIns="91425" wrap="square" tIns="91425">
+            <a:spAutoFit/>
+          </a:bodyPr>
+          <a:lstStyle/>
+          <a:p>
+            <a:pPr indent="0" lvl="0" marL="0" rtl="0" algn="l">
+              <a:spcBef>
+                <a:spcPts val="0"/>
+              </a:spcBef>
+              <a:spcAft>
+                <a:spcPts val="0"/>
+              </a:spcAft>
+              <a:buNone/>
+            </a:pPr>
+            <a:r>
+              <a:rPr lang="en" sz="1600">
+                <a:solidFill>
+                  <a:schemeClr val="dk2"/>
+                </a:solidFill>
+              </a:rPr>
+              <a:t>Target logits</a:t>
+            </a:r>
+            <a:endParaRPr sz="1600">
+              <a:solidFill>
+                <a:schemeClr val="dk2"/>
+              </a:solidFill>
+            </a:endParaRPr>
+          </a:p>
+        </p:txBody>
+      </p:sp>
+      <p:sp>
+        <p:nvSpPr>
+          <p:cNvPr id="208" name="Google Shape;208;p27"/>
+          <p:cNvSpPr/>
+          <p:nvPr/>
+        </p:nvSpPr>
+        <p:spPr>
+          <a:xfrm>
+            <a:off x="867102" y="1845200"/>
+            <a:ext cx="207900" cy="276900"/>
+          </a:xfrm>
+          <a:prstGeom prst="upArrow">
+            <a:avLst>
+              <a:gd fmla="val 50000" name="adj1"/>
+              <a:gd fmla="val 50000" name="adj2"/>
+            </a:avLst>
+          </a:prstGeom>
+          <a:solidFill>
+            <a:schemeClr val="lt2"/>
+          </a:solidFill>
+          <a:ln cap="flat" cmpd="sng" w="9525">
+            <a:solidFill>
+              <a:schemeClr val="dk2"/>
+            </a:solidFill>
+            <a:prstDash val="solid"/>
+            <a:round/>
+            <a:headEnd len="sm" w="sm" type="none"/>
+            <a:tailEnd len="sm" w="sm" type="none"/>
+          </a:ln>
+        </p:spPr>
+        <p:txBody>
+          <a:bodyPr anchorCtr="0" anchor="ctr" bIns="91425" lIns="91425" spcFirstLastPara="1" rIns="91425" wrap="square" tIns="91425">
+            <a:noAutofit/>
+          </a:bodyPr>
+          <a:lstStyle/>
+          <a:p>
+            <a:pPr indent="0" lvl="0" marL="0" rtl="0" algn="ctr">
+              <a:spcBef>
+                <a:spcPts val="0"/>
+              </a:spcBef>
+              <a:spcAft>
+                <a:spcPts val="0"/>
+              </a:spcAft>
+              <a:buNone/>
+            </a:pPr>
+            <a:r>
+              <a:t/>
+            </a:r>
+            <a:endParaRPr/>
+          </a:p>
+        </p:txBody>
+      </p:sp>
+      <p:cxnSp>
+        <p:nvCxnSpPr>
+          <p:cNvPr id="209" name="Google Shape;209;p27"/>
+          <p:cNvCxnSpPr/>
+          <p:nvPr/>
+        </p:nvCxnSpPr>
+        <p:spPr>
+          <a:xfrm rot="10800000">
+            <a:off x="1715625" y="1537550"/>
+            <a:ext cx="314400" cy="1800"/>
+          </a:xfrm>
+          <a:prstGeom prst="straightConnector1">
+            <a:avLst/>
+          </a:prstGeom>
+          <a:noFill/>
+          <a:ln cap="flat" cmpd="sng" w="9525">
+            <a:solidFill>
+              <a:schemeClr val="dk2"/>
+            </a:solidFill>
+            <a:prstDash val="solid"/>
+            <a:round/>
+            <a:headEnd len="med" w="med" type="none"/>
+            <a:tailEnd len="med" w="med" type="triangle"/>
+          </a:ln>
+        </p:spPr>
+      </p:cxnSp>
+    </p:spTree>
+  </p:cSld>
+  <p:clrMapOvr>
+    <a:masterClrMapping/>
+  </p:clrMapOvr>
+</p:sld>
+</file>
+
+<file path=ppt/slides/slide16.xml><?xml version="1.0" encoding="utf-8"?>
+<p:sld xmlns:a="http://schemas.openxmlformats.org/drawingml/2006/main" xmlns:r="http://schemas.openxmlformats.org/officeDocument/2006/relationships" xmlns:mc="http://schemas.openxmlformats.org/markup-compatibility/2006" xmlns:mv="urn:schemas-microsoft-com:mac:vml" xmlns:p="http://schemas.openxmlformats.org/presentationml/2006/main" xmlns:c="http://schemas.openxmlformats.org/drawingml/2006/chart" xmlns:dgm="http://schemas.openxmlformats.org/drawingml/2006/diagram" xmlns:o="urn:schemas-microsoft-com:office:office" xmlns:v="urn:schemas-microsoft-com:vml" xmlns:pvml="urn:schemas-microsoft-com:office:powerpoint" xmlns:com="http://schemas.openxmlformats.org/drawingml/2006/compatibility" xmlns:p14="http://schemas.microsoft.com/office/powerpoint/2010/main" xmlns:p15="http://schemas.microsoft.com/office/powerpoint/2012/main" xmlns:ahyp="http://schemas.microsoft.com/office/drawing/2018/hyperlinkcolor">
+  <p:cSld>
+    <p:spTree>
+      <p:nvGrpSpPr>
+        <p:cNvPr id="213" name="Shape 213"/>
+        <p:cNvGrpSpPr/>
+        <p:nvPr/>
+      </p:nvGrpSpPr>
+      <p:grpSpPr>
+        <a:xfrm>
+          <a:off x="0" y="0"/>
+          <a:ext cx="0" cy="0"/>
+          <a:chOff x="0" y="0"/>
+          <a:chExt cx="0" cy="0"/>
+        </a:xfrm>
+      </p:grpSpPr>
+      <p:sp>
+        <p:nvSpPr>
+          <p:cNvPr id="214" name="Google Shape;214;p28"/>
+          <p:cNvSpPr txBox="1"/>
+          <p:nvPr>
+            <p:ph type="title"/>
+          </p:nvPr>
+        </p:nvSpPr>
+        <p:spPr>
+          <a:xfrm>
+            <a:off x="311700" y="445025"/>
+            <a:ext cx="8520600" cy="572700"/>
+          </a:xfrm>
+          <a:prstGeom prst="rect">
+            <a:avLst/>
+          </a:prstGeom>
+        </p:spPr>
+        <p:txBody>
+          <a:bodyPr anchorCtr="0" anchor="t" bIns="91425" lIns="91425" spcFirstLastPara="1" rIns="91425" wrap="square" tIns="91425">
+            <a:normAutofit fontScale="90000"/>
+          </a:bodyPr>
+          <a:lstStyle/>
+          <a:p>
+            <a:pPr indent="0" lvl="0" marL="0" rtl="0" algn="l">
+              <a:spcBef>
+                <a:spcPts val="0"/>
+              </a:spcBef>
+              <a:spcAft>
+                <a:spcPts val="0"/>
+              </a:spcAft>
+              <a:buNone/>
+            </a:pPr>
+            <a:r>
+              <a:rPr lang="en"/>
+              <a:t>Decoder-only models</a:t>
+            </a:r>
+            <a:endParaRPr/>
+          </a:p>
+        </p:txBody>
+      </p:sp>
+      <p:graphicFrame>
+        <p:nvGraphicFramePr>
+          <p:cNvPr id="215" name="Google Shape;215;p28"/>
+          <p:cNvGraphicFramePr/>
+          <p:nvPr/>
+        </p:nvGraphicFramePr>
+        <p:xfrm>
+          <a:off x="952500" y="1619250"/>
+          <a:ext cx="3000000" cy="3000000"/>
+        </p:xfrm>
+        <a:graphic>
+          <a:graphicData uri="http://schemas.openxmlformats.org/drawingml/2006/table">
+            <a:tbl>
+              <a:tblPr>
+                <a:noFill/>
+                <a:tableStyleId>{D7C7AB69-32D0-4E43-AA6A-C73308EDF23E}</a:tableStyleId>
+              </a:tblPr>
+              <a:tblGrid>
+                <a:gridCol w="2413000"/>
+                <a:gridCol w="2413000"/>
+                <a:gridCol w="2413000"/>
+              </a:tblGrid>
+              <a:tr h="381000">
+                <a:tc>
+                  <a:txBody>
+                    <a:bodyPr/>
+                    <a:lstStyle/>
+                    <a:p>
+                      <a:pPr indent="0" lvl="0" marL="0" rtl="0" algn="l">
+                        <a:spcBef>
+                          <a:spcPts val="0"/>
+                        </a:spcBef>
+                        <a:spcAft>
+                          <a:spcPts val="0"/>
+                        </a:spcAft>
+                        <a:buNone/>
+                      </a:pPr>
+                      <a:r>
+                        <a:t/>
+                      </a:r>
+                      <a:endParaRPr b="1"/>
+                    </a:p>
+                  </a:txBody>
+                  <a:tcPr marT="91425" marB="91425" marR="91425" marL="91425"/>
+                </a:tc>
+                <a:tc>
+                  <a:txBody>
+                    <a:bodyPr/>
+                    <a:lstStyle/>
+                    <a:p>
+                      <a:pPr indent="0" lvl="0" marL="0" rtl="0" algn="l">
+                        <a:spcBef>
+                          <a:spcPts val="0"/>
+                        </a:spcBef>
+                        <a:spcAft>
+                          <a:spcPts val="0"/>
+                        </a:spcAft>
+                        <a:buNone/>
+                      </a:pPr>
+                      <a:r>
+                        <a:rPr b="1" lang="en"/>
+                        <a:t>Encoder-only</a:t>
+                      </a:r>
+                      <a:endParaRPr b="1"/>
+                    </a:p>
+                  </a:txBody>
+                  <a:tcPr marT="91425" marB="91425" marR="91425" marL="91425"/>
+                </a:tc>
+                <a:tc>
+                  <a:txBody>
+                    <a:bodyPr/>
+                    <a:lstStyle/>
+                    <a:p>
+                      <a:pPr indent="0" lvl="0" marL="0" rtl="0" algn="l">
+                        <a:spcBef>
+                          <a:spcPts val="0"/>
+                        </a:spcBef>
+                        <a:spcAft>
+                          <a:spcPts val="0"/>
+                        </a:spcAft>
+                        <a:buNone/>
+                      </a:pPr>
+                      <a:r>
+                        <a:rPr b="1" lang="en"/>
+                        <a:t>Decoder-only</a:t>
+                      </a:r>
+                      <a:endParaRPr b="1"/>
+                    </a:p>
+                  </a:txBody>
+                  <a:tcPr marT="91425" marB="91425" marR="91425" marL="91425"/>
+                </a:tc>
+              </a:tr>
+              <a:tr h="381000">
+                <a:tc>
+                  <a:txBody>
+                    <a:bodyPr/>
+                    <a:lstStyle/>
+                    <a:p>
+                      <a:pPr indent="0" lvl="0" marL="0" rtl="0" algn="l">
+                        <a:spcBef>
+                          <a:spcPts val="0"/>
+                        </a:spcBef>
+                        <a:spcAft>
+                          <a:spcPts val="0"/>
+                        </a:spcAft>
+                        <a:buNone/>
+                      </a:pPr>
+                      <a:r>
+                        <a:rPr b="1" lang="en"/>
+                        <a:t>Attention mask</a:t>
+                      </a:r>
+                      <a:endParaRPr b="1"/>
+                    </a:p>
+                  </a:txBody>
+                  <a:tcPr marT="91425" marB="91425" marR="91425" marL="91425"/>
+                </a:tc>
+                <a:tc>
+                  <a:txBody>
+                    <a:bodyPr/>
+                    <a:lstStyle/>
+                    <a:p>
+                      <a:pPr indent="0" lvl="0" marL="0" rtl="0" algn="l">
+                        <a:spcBef>
+                          <a:spcPts val="0"/>
+                        </a:spcBef>
+                        <a:spcAft>
+                          <a:spcPts val="0"/>
+                        </a:spcAft>
+                        <a:buNone/>
+                      </a:pPr>
+                      <a:r>
+                        <a:rPr lang="en"/>
+                        <a:t>Full--each token can see all tokens</a:t>
+                      </a:r>
+                      <a:endParaRPr/>
+                    </a:p>
+                  </a:txBody>
+                  <a:tcPr marT="91425" marB="91425" marR="91425" marL="91425"/>
+                </a:tc>
+                <a:tc>
+                  <a:txBody>
+                    <a:bodyPr/>
+                    <a:lstStyle/>
+                    <a:p>
+                      <a:pPr indent="0" lvl="0" marL="0" rtl="0" algn="l">
+                        <a:spcBef>
+                          <a:spcPts val="0"/>
+                        </a:spcBef>
+                        <a:spcAft>
+                          <a:spcPts val="0"/>
+                        </a:spcAft>
+                        <a:buNone/>
+                      </a:pPr>
+                      <a:r>
+                        <a:rPr lang="en"/>
+                        <a:t>Causal--each token can only see tokens before it</a:t>
+                      </a:r>
+                      <a:endParaRPr/>
+                    </a:p>
+                  </a:txBody>
+                  <a:tcPr marT="91425" marB="91425" marR="91425" marL="91425"/>
+                </a:tc>
+              </a:tr>
+              <a:tr h="381000">
+                <a:tc>
+                  <a:txBody>
+                    <a:bodyPr/>
+                    <a:lstStyle/>
+                    <a:p>
+                      <a:pPr indent="0" lvl="0" marL="0" rtl="0" algn="l">
+                        <a:spcBef>
+                          <a:spcPts val="0"/>
+                        </a:spcBef>
+                        <a:spcAft>
+                          <a:spcPts val="0"/>
+                        </a:spcAft>
+                        <a:buNone/>
+                      </a:pPr>
+                      <a:r>
+                        <a:rPr b="1" lang="en"/>
+                        <a:t>Loss</a:t>
+                      </a:r>
+                      <a:endParaRPr b="1"/>
+                    </a:p>
+                  </a:txBody>
+                  <a:tcPr marT="91425" marB="91425" marR="91425" marL="91425"/>
+                </a:tc>
+                <a:tc>
+                  <a:txBody>
+                    <a:bodyPr/>
+                    <a:lstStyle/>
+                    <a:p>
+                      <a:pPr indent="0" lvl="0" marL="0" rtl="0" algn="l">
+                        <a:spcBef>
+                          <a:spcPts val="0"/>
+                        </a:spcBef>
+                        <a:spcAft>
+                          <a:spcPts val="0"/>
+                        </a:spcAft>
+                        <a:buNone/>
+                      </a:pPr>
+                      <a:r>
+                        <a:rPr lang="en"/>
+                        <a:t>Masked language modeling loss</a:t>
+                      </a:r>
+                      <a:endParaRPr/>
+                    </a:p>
+                  </a:txBody>
+                  <a:tcPr marT="91425" marB="91425" marR="91425" marL="91425"/>
+                </a:tc>
+                <a:tc>
+                  <a:txBody>
+                    <a:bodyPr/>
+                    <a:lstStyle/>
+                    <a:p>
+                      <a:pPr indent="0" lvl="0" marL="0" rtl="0" algn="l">
+                        <a:spcBef>
+                          <a:spcPts val="0"/>
+                        </a:spcBef>
+                        <a:spcAft>
+                          <a:spcPts val="0"/>
+                        </a:spcAft>
+                        <a:buNone/>
+                      </a:pPr>
+                      <a:r>
+                        <a:rPr lang="en"/>
+                        <a:t>Next token prediction loss</a:t>
+                      </a:r>
+                      <a:endParaRPr/>
+                    </a:p>
+                  </a:txBody>
+                  <a:tcPr marT="91425" marB="91425" marR="91425" marL="91425"/>
+                </a:tc>
+              </a:tr>
+              <a:tr h="381000">
+                <a:tc>
+                  <a:txBody>
+                    <a:bodyPr/>
+                    <a:lstStyle/>
+                    <a:p>
+                      <a:pPr indent="0" lvl="0" marL="0" rtl="0" algn="l">
+                        <a:spcBef>
+                          <a:spcPts val="0"/>
+                        </a:spcBef>
+                        <a:spcAft>
+                          <a:spcPts val="0"/>
+                        </a:spcAft>
+                        <a:buNone/>
+                      </a:pPr>
+                      <a:r>
+                        <a:rPr b="1" lang="en"/>
+                        <a:t>Token and position embeddings</a:t>
+                      </a:r>
+                      <a:endParaRPr b="1"/>
+                    </a:p>
+                  </a:txBody>
+                  <a:tcPr marT="91425" marB="91425" marR="91425" marL="91425"/>
+                </a:tc>
+                <a:tc>
+                  <a:txBody>
+                    <a:bodyPr/>
+                    <a:lstStyle/>
+                    <a:p>
+                      <a:pPr indent="0" lvl="0" marL="0" rtl="0" algn="l">
+                        <a:spcBef>
+                          <a:spcPts val="0"/>
+                        </a:spcBef>
+                        <a:spcAft>
+                          <a:spcPts val="0"/>
+                        </a:spcAft>
+                        <a:buNone/>
+                      </a:pPr>
+                      <a:r>
+                        <a:rPr lang="en"/>
+                        <a:t>Same</a:t>
+                      </a:r>
+                      <a:endParaRPr/>
+                    </a:p>
+                  </a:txBody>
+                  <a:tcPr marT="91425" marB="91425" marR="91425" marL="91425"/>
+                </a:tc>
+                <a:tc>
+                  <a:txBody>
+                    <a:bodyPr/>
+                    <a:lstStyle/>
+                    <a:p>
+                      <a:pPr indent="0" lvl="0" marL="0" rtl="0" algn="l">
+                        <a:spcBef>
+                          <a:spcPts val="0"/>
+                        </a:spcBef>
+                        <a:spcAft>
+                          <a:spcPts val="0"/>
+                        </a:spcAft>
+                        <a:buNone/>
+                      </a:pPr>
+                      <a:r>
+                        <a:rPr lang="en"/>
+                        <a:t>Same</a:t>
+                      </a:r>
+                      <a:endParaRPr/>
+                    </a:p>
+                  </a:txBody>
+                  <a:tcPr marT="91425" marB="91425" marR="91425" marL="91425"/>
+                </a:tc>
+              </a:tr>
+              <a:tr h="381000">
+                <a:tc>
+                  <a:txBody>
+                    <a:bodyPr/>
+                    <a:lstStyle/>
+                    <a:p>
+                      <a:pPr indent="0" lvl="0" marL="0" rtl="0" algn="l">
+                        <a:spcBef>
+                          <a:spcPts val="0"/>
+                        </a:spcBef>
+                        <a:spcAft>
+                          <a:spcPts val="0"/>
+                        </a:spcAft>
+                        <a:buNone/>
+                      </a:pPr>
+                      <a:r>
+                        <a:rPr b="1" lang="en"/>
+                        <a:t>Transformer block</a:t>
+                      </a:r>
+                      <a:endParaRPr b="1"/>
+                    </a:p>
+                  </a:txBody>
+                  <a:tcPr marT="91425" marB="91425" marR="91425" marL="91425"/>
+                </a:tc>
+                <a:tc>
+                  <a:txBody>
+                    <a:bodyPr/>
+                    <a:lstStyle/>
+                    <a:p>
+                      <a:pPr indent="0" lvl="0" marL="0" rtl="0" algn="l">
+                        <a:spcBef>
+                          <a:spcPts val="0"/>
+                        </a:spcBef>
+                        <a:spcAft>
+                          <a:spcPts val="0"/>
+                        </a:spcAft>
+                        <a:buNone/>
+                      </a:pPr>
+                      <a:r>
+                        <a:rPr lang="en"/>
+                        <a:t>Same (except attention block)</a:t>
+                      </a:r>
+                      <a:endParaRPr/>
+                    </a:p>
+                  </a:txBody>
+                  <a:tcPr marT="91425" marB="91425" marR="91425" marL="91425"/>
+                </a:tc>
+                <a:tc>
+                  <a:txBody>
+                    <a:bodyPr/>
+                    <a:lstStyle/>
+                    <a:p>
+                      <a:pPr indent="0" lvl="0" marL="0" rtl="0" algn="l">
+                        <a:spcBef>
+                          <a:spcPts val="0"/>
+                        </a:spcBef>
+                        <a:spcAft>
+                          <a:spcPts val="0"/>
+                        </a:spcAft>
+                        <a:buNone/>
+                      </a:pPr>
+                      <a:r>
+                        <a:rPr lang="en"/>
+                        <a:t>Same </a:t>
+                      </a:r>
+                      <a:r>
+                        <a:rPr lang="en">
+                          <a:solidFill>
+                            <a:schemeClr val="dk1"/>
+                          </a:solidFill>
+                        </a:rPr>
+                        <a:t>(except attention block)</a:t>
+                      </a:r>
+                      <a:endParaRPr>
+                        <a:solidFill>
+                          <a:schemeClr val="dk1"/>
+                        </a:solidFill>
+                      </a:endParaRPr>
+                    </a:p>
+                    <a:p>
+                      <a:pPr indent="0" lvl="0" marL="0" rtl="0" algn="l">
+                        <a:spcBef>
+                          <a:spcPts val="0"/>
+                        </a:spcBef>
+                        <a:spcAft>
+                          <a:spcPts val="0"/>
+                        </a:spcAft>
+                        <a:buNone/>
+                      </a:pPr>
+                      <a:r>
+                        <a:t/>
+                      </a:r>
+                      <a:endParaRPr/>
+                    </a:p>
+                  </a:txBody>
+                  <a:tcPr marT="91425" marB="91425" marR="91425" marL="91425"/>
+                </a:tc>
+              </a:tr>
+            </a:tbl>
+          </a:graphicData>
+        </a:graphic>
+      </p:graphicFrame>
     </p:spTree>
   </p:cSld>
   <p:clrMapOvr>
@@ -8337,7 +11539,7 @@
             <a:tbl>
               <a:tblPr>
                 <a:noFill/>
-                <a:tableStyleId>{61CC802C-7944-48C8-B220-CE1D888F6A8D}</a:tableStyleId>
+                <a:tableStyleId>{D7C7AB69-32D0-4E43-AA6A-C73308EDF23E}</a:tableStyleId>
               </a:tblPr>
               <a:tblGrid>
                 <a:gridCol w="504925"/>
@@ -8650,7 +11852,7 @@
             <a:tbl>
               <a:tblPr>
                 <a:noFill/>
-                <a:tableStyleId>{61CC802C-7944-48C8-B220-CE1D888F6A8D}</a:tableStyleId>
+                <a:tableStyleId>{D7C7AB69-32D0-4E43-AA6A-C73308EDF23E}</a:tableStyleId>
               </a:tblPr>
               <a:tblGrid>
                 <a:gridCol w="504925"/>
@@ -8963,7 +12165,7 @@
             <a:tbl>
               <a:tblPr>
                 <a:noFill/>
-                <a:tableStyleId>{61CC802C-7944-48C8-B220-CE1D888F6A8D}</a:tableStyleId>
+                <a:tableStyleId>{D7C7AB69-32D0-4E43-AA6A-C73308EDF23E}</a:tableStyleId>
               </a:tblPr>
               <a:tblGrid>
                 <a:gridCol w="504925"/>
@@ -9319,6 +12521,156 @@
           </a:p>
         </p:txBody>
       </p:sp>
+      <p:sp>
+        <p:nvSpPr>
+          <p:cNvPr id="73" name="Google Shape;73;p15"/>
+          <p:cNvSpPr txBox="1"/>
+          <p:nvPr/>
+        </p:nvSpPr>
+        <p:spPr>
+          <a:xfrm>
+            <a:off x="47625" y="4595600"/>
+            <a:ext cx="1893000" cy="615600"/>
+          </a:xfrm>
+          <a:prstGeom prst="rect">
+            <a:avLst/>
+          </a:prstGeom>
+          <a:noFill/>
+          <a:ln>
+            <a:noFill/>
+          </a:ln>
+        </p:spPr>
+        <p:txBody>
+          <a:bodyPr anchorCtr="0" anchor="t" bIns="91425" lIns="91425" spcFirstLastPara="1" rIns="91425" wrap="square" tIns="91425">
+            <a:spAutoFit/>
+          </a:bodyPr>
+          <a:lstStyle/>
+          <a:p>
+            <a:pPr indent="0" lvl="0" marL="0" rtl="0" algn="ctr">
+              <a:spcBef>
+                <a:spcPts val="0"/>
+              </a:spcBef>
+              <a:spcAft>
+                <a:spcPts val="0"/>
+              </a:spcAft>
+              <a:buNone/>
+            </a:pPr>
+            <a:r>
+              <a:rPr lang="en">
+                <a:solidFill>
+                  <a:schemeClr val="dk2"/>
+                </a:solidFill>
+              </a:rPr>
+              <a:t>Tokenization + padding</a:t>
+            </a:r>
+            <a:endParaRPr>
+              <a:solidFill>
+                <a:schemeClr val="dk2"/>
+              </a:solidFill>
+            </a:endParaRPr>
+          </a:p>
+        </p:txBody>
+      </p:sp>
+      <p:sp>
+        <p:nvSpPr>
+          <p:cNvPr id="74" name="Google Shape;74;p15"/>
+          <p:cNvSpPr txBox="1"/>
+          <p:nvPr/>
+        </p:nvSpPr>
+        <p:spPr>
+          <a:xfrm>
+            <a:off x="47625" y="4125688"/>
+            <a:ext cx="1893000" cy="400200"/>
+          </a:xfrm>
+          <a:prstGeom prst="rect">
+            <a:avLst/>
+          </a:prstGeom>
+          <a:noFill/>
+          <a:ln>
+            <a:noFill/>
+          </a:ln>
+        </p:spPr>
+        <p:txBody>
+          <a:bodyPr anchorCtr="0" anchor="t" bIns="91425" lIns="91425" spcFirstLastPara="1" rIns="91425" wrap="square" tIns="91425">
+            <a:spAutoFit/>
+          </a:bodyPr>
+          <a:lstStyle/>
+          <a:p>
+            <a:pPr indent="0" lvl="0" marL="0" rtl="0" algn="ctr">
+              <a:spcBef>
+                <a:spcPts val="0"/>
+              </a:spcBef>
+              <a:spcAft>
+                <a:spcPts val="0"/>
+              </a:spcAft>
+              <a:buNone/>
+            </a:pPr>
+            <a:r>
+              <a:rPr lang="en">
+                <a:solidFill>
+                  <a:schemeClr val="dk2"/>
+                </a:solidFill>
+              </a:rPr>
+              <a:t>Pad mask</a:t>
+            </a:r>
+            <a:endParaRPr>
+              <a:solidFill>
+                <a:schemeClr val="dk2"/>
+              </a:solidFill>
+            </a:endParaRPr>
+          </a:p>
+        </p:txBody>
+      </p:sp>
+      <p:sp>
+        <p:nvSpPr>
+          <p:cNvPr id="75" name="Google Shape;75;p15"/>
+          <p:cNvSpPr txBox="1"/>
+          <p:nvPr/>
+        </p:nvSpPr>
+        <p:spPr>
+          <a:xfrm>
+            <a:off x="47625" y="3414000"/>
+            <a:ext cx="1893000" cy="615600"/>
+          </a:xfrm>
+          <a:prstGeom prst="rect">
+            <a:avLst/>
+          </a:prstGeom>
+          <a:noFill/>
+          <a:ln>
+            <a:noFill/>
+          </a:ln>
+        </p:spPr>
+        <p:txBody>
+          <a:bodyPr anchorCtr="0" anchor="t" bIns="91425" lIns="91425" spcFirstLastPara="1" rIns="91425" wrap="square" tIns="91425">
+            <a:spAutoFit/>
+          </a:bodyPr>
+          <a:lstStyle/>
+          <a:p>
+            <a:pPr indent="0" lvl="0" marL="0" rtl="0" algn="ctr">
+              <a:spcBef>
+                <a:spcPts val="0"/>
+              </a:spcBef>
+              <a:spcAft>
+                <a:spcPts val="0"/>
+              </a:spcAft>
+              <a:buNone/>
+            </a:pPr>
+            <a:r>
+              <a:rPr lang="en">
+                <a:solidFill>
+                  <a:schemeClr val="dk2"/>
+                </a:solidFill>
+              </a:rPr>
+              <a:t>Token + position embeddings</a:t>
+            </a:r>
+            <a:endParaRPr>
+              <a:solidFill>
+                <a:schemeClr val="dk2"/>
+              </a:solidFill>
+            </a:endParaRPr>
+          </a:p>
+        </p:txBody>
+      </p:sp>
     </p:spTree>
   </p:cSld>
   <p:clrMapOvr>
@@ -9332,7 +12684,7 @@
   <p:cSld>
     <p:spTree>
       <p:nvGrpSpPr>
-        <p:cNvPr id="76" name="Shape 76"/>
+        <p:cNvPr id="79" name="Shape 79"/>
         <p:cNvGrpSpPr/>
         <p:nvPr/>
       </p:nvGrpSpPr>
@@ -9346,7 +12698,7 @@
       </p:grpSpPr>
       <p:sp>
         <p:nvSpPr>
-          <p:cNvPr id="77" name="Google Shape;77;p16"/>
+          <p:cNvPr id="80" name="Google Shape;80;p16"/>
           <p:cNvSpPr txBox="1"/>
           <p:nvPr>
             <p:ph type="title"/>
@@ -9377,7 +12729,8 @@
               <a:buNone/>
             </a:pPr>
             <a:r>
-              <a:t/>
+              <a:rPr lang="en"/>
+              <a:t>What can we do with Transformers</a:t>
             </a:r>
             <a:endParaRPr/>
           </a:p>
@@ -9385,7 +12738,7 @@
       </p:sp>
       <p:sp>
         <p:nvSpPr>
-          <p:cNvPr id="78" name="Google Shape;78;p16"/>
+          <p:cNvPr id="81" name="Google Shape;81;p16"/>
           <p:cNvSpPr txBox="1"/>
           <p:nvPr>
             <p:ph idx="1" type="body"/>
@@ -9561,7 +12914,7 @@
   <p:cSld>
     <p:spTree>
       <p:nvGrpSpPr>
-        <p:cNvPr id="82" name="Shape 82"/>
+        <p:cNvPr id="85" name="Shape 85"/>
         <p:cNvGrpSpPr/>
         <p:nvPr/>
       </p:nvGrpSpPr>
@@ -9575,7 +12928,7 @@
       </p:grpSpPr>
       <p:sp>
         <p:nvSpPr>
-          <p:cNvPr id="83" name="Google Shape;83;p17"/>
+          <p:cNvPr id="86" name="Google Shape;86;p17"/>
           <p:cNvSpPr txBox="1"/>
           <p:nvPr>
             <p:ph type="title"/>
@@ -9615,7 +12968,7 @@
       </p:sp>
       <p:sp>
         <p:nvSpPr>
-          <p:cNvPr id="84" name="Google Shape;84;p17"/>
+          <p:cNvPr id="87" name="Google Shape;87;p17"/>
           <p:cNvSpPr txBox="1"/>
           <p:nvPr>
             <p:ph idx="1" type="body"/>
@@ -9738,7 +13091,7 @@
   <p:cSld>
     <p:spTree>
       <p:nvGrpSpPr>
-        <p:cNvPr id="88" name="Shape 88"/>
+        <p:cNvPr id="91" name="Shape 91"/>
         <p:cNvGrpSpPr/>
         <p:nvPr/>
       </p:nvGrpSpPr>
@@ -9752,7 +13105,7 @@
       </p:grpSpPr>
       <p:sp>
         <p:nvSpPr>
-          <p:cNvPr id="89" name="Google Shape;89;p18"/>
+          <p:cNvPr id="92" name="Google Shape;92;p18"/>
           <p:cNvSpPr txBox="1"/>
           <p:nvPr>
             <p:ph type="title"/>
@@ -9792,7 +13145,7 @@
       </p:sp>
       <p:sp>
         <p:nvSpPr>
-          <p:cNvPr id="90" name="Google Shape;90;p18"/>
+          <p:cNvPr id="93" name="Google Shape;93;p18"/>
           <p:cNvSpPr txBox="1"/>
           <p:nvPr>
             <p:ph idx="1" type="body"/>
@@ -9878,7 +13231,7 @@
   <p:cSld>
     <p:spTree>
       <p:nvGrpSpPr>
-        <p:cNvPr id="94" name="Shape 94"/>
+        <p:cNvPr id="97" name="Shape 97"/>
         <p:cNvGrpSpPr/>
         <p:nvPr/>
       </p:nvGrpSpPr>
@@ -9892,7 +13245,7 @@
       </p:grpSpPr>
       <p:sp>
         <p:nvSpPr>
-          <p:cNvPr id="95" name="Google Shape;95;p19"/>
+          <p:cNvPr id="98" name="Google Shape;98;p19"/>
           <p:cNvSpPr txBox="1"/>
           <p:nvPr>
             <p:ph type="title"/>
@@ -9932,7 +13285,7 @@
       </p:sp>
       <p:sp>
         <p:nvSpPr>
-          <p:cNvPr id="96" name="Google Shape;96;p19"/>
+          <p:cNvPr id="99" name="Google Shape;99;p19"/>
           <p:cNvSpPr txBox="1"/>
           <p:nvPr>
             <p:ph idx="1" type="body"/>
@@ -10095,7 +13448,7 @@
   <p:cSld>
     <p:spTree>
       <p:nvGrpSpPr>
-        <p:cNvPr id="100" name="Shape 100"/>
+        <p:cNvPr id="103" name="Shape 103"/>
         <p:cNvGrpSpPr/>
         <p:nvPr/>
       </p:nvGrpSpPr>
@@ -10109,7 +13462,7 @@
       </p:grpSpPr>
       <p:sp>
         <p:nvSpPr>
-          <p:cNvPr id="101" name="Google Shape;101;p20"/>
+          <p:cNvPr id="104" name="Google Shape;104;p20"/>
           <p:cNvSpPr txBox="1"/>
           <p:nvPr>
             <p:ph type="title"/>
@@ -10149,7 +13502,7 @@
       </p:sp>
       <p:sp>
         <p:nvSpPr>
-          <p:cNvPr id="102" name="Google Shape;102;p20"/>
+          <p:cNvPr id="105" name="Google Shape;105;p20"/>
           <p:cNvSpPr txBox="1"/>
           <p:nvPr>
             <p:ph idx="1" type="body"/>
@@ -10232,7 +13585,7 @@
   <p:cSld>
     <p:spTree>
       <p:nvGrpSpPr>
-        <p:cNvPr id="106" name="Shape 106"/>
+        <p:cNvPr id="109" name="Shape 109"/>
         <p:cNvGrpSpPr/>
         <p:nvPr/>
       </p:nvGrpSpPr>
@@ -10246,7 +13599,7 @@
       </p:grpSpPr>
       <p:sp>
         <p:nvSpPr>
-          <p:cNvPr id="107" name="Google Shape;107;p21"/>
+          <p:cNvPr id="110" name="Google Shape;110;p21"/>
           <p:cNvSpPr txBox="1"/>
           <p:nvPr>
             <p:ph type="title"/>
@@ -10286,7 +13639,7 @@
       </p:sp>
       <p:sp>
         <p:nvSpPr>
-          <p:cNvPr id="108" name="Google Shape;108;p21"/>
+          <p:cNvPr id="111" name="Google Shape;111;p21"/>
           <p:cNvSpPr txBox="1"/>
           <p:nvPr>
             <p:ph idx="1" type="body"/>
